--- a/presentation/TwinSense_Presentation.pptx
+++ b/presentation/TwinSense_Presentation.pptx
@@ -5,25 +5,25 @@
     <p:sldMasterId id="2147483648" r:id="rId1"/>
   </p:sldMasterIdLst>
   <p:sldIdLst>
-    <p:sldId id="256" r:id="rId7"/>
-    <p:sldId id="257" r:id="rId8"/>
-    <p:sldId id="258" r:id="rId9"/>
-    <p:sldId id="259" r:id="rId10"/>
-    <p:sldId id="260" r:id="rId11"/>
-    <p:sldId id="261" r:id="rId12"/>
-    <p:sldId id="262" r:id="rId13"/>
-    <p:sldId id="263" r:id="rId14"/>
-    <p:sldId id="264" r:id="rId15"/>
-    <p:sldId id="265" r:id="rId16"/>
-    <p:sldId id="266" r:id="rId17"/>
-    <p:sldId id="267" r:id="rId18"/>
-    <p:sldId id="268" r:id="rId19"/>
-    <p:sldId id="269" r:id="rId20"/>
-    <p:sldId id="270" r:id="rId21"/>
-    <p:sldId id="271" r:id="rId22"/>
-    <p:sldId id="272" r:id="rId23"/>
+    <p:sldId id="256" r:id="rId2"/>
+    <p:sldId id="257" r:id="rId3"/>
+    <p:sldId id="258" r:id="rId4"/>
+    <p:sldId id="259" r:id="rId5"/>
+    <p:sldId id="260" r:id="rId6"/>
+    <p:sldId id="261" r:id="rId7"/>
+    <p:sldId id="262" r:id="rId8"/>
+    <p:sldId id="263" r:id="rId9"/>
+    <p:sldId id="264" r:id="rId10"/>
+    <p:sldId id="265" r:id="rId11"/>
+    <p:sldId id="266" r:id="rId12"/>
+    <p:sldId id="267" r:id="rId13"/>
+    <p:sldId id="268" r:id="rId14"/>
+    <p:sldId id="269" r:id="rId15"/>
+    <p:sldId id="270" r:id="rId16"/>
+    <p:sldId id="271" r:id="rId17"/>
+    <p:sldId id="272" r:id="rId18"/>
   </p:sldIdLst>
-  <p:sldSz cx="12191695" cy="6858000" type="screen4x3"/>
+  <p:sldSz cx="12192000" cy="6858000"/>
   <p:notesSz cx="6858000" cy="9144000"/>
   <p:defaultTextStyle>
     <a:defPPr>
@@ -120,6 +120,22 @@
       </a:defRPr>
     </a:lvl9pPr>
   </p:defaultTextStyle>
+  <p:extLst>
+    <p:ext uri="{EFAFB233-063F-42B5-8137-9DF3F51BA10A}">
+      <p15:sldGuideLst xmlns:p15="http://schemas.microsoft.com/office/powerpoint/2012/main">
+        <p15:guide id="1" orient="horz" pos="2160">
+          <p15:clr>
+            <a:srgbClr val="A4A3A4"/>
+          </p15:clr>
+        </p15:guide>
+        <p15:guide id="2" pos="2880">
+          <p15:clr>
+            <a:srgbClr val="A4A3A4"/>
+          </p15:clr>
+        </p15:guide>
+      </p15:sldGuideLst>
+    </p:ext>
+  </p:extLst>
 </p:presentation>
 </file>
 
@@ -161,10 +177,9 @@
           <a:lstStyle/>
           <a:p>
             <a:r>
-              <a:rPr lang="en-US" smtClean="0"/>
+              <a:rPr lang="en-US"/>
               <a:t>Click to edit Master title style</a:t>
             </a:r>
-            <a:endParaRPr lang="en-US"/>
           </a:p>
         </p:txBody>
       </p:sp>
@@ -280,10 +295,9 @@
           </a:lstStyle>
           <a:p>
             <a:r>
-              <a:rPr lang="en-US" smtClean="0"/>
+              <a:rPr lang="en-US"/>
               <a:t>Click to edit Master subtitle style</a:t>
             </a:r>
-            <a:endParaRPr lang="en-US"/>
           </a:p>
         </p:txBody>
       </p:sp>
@@ -304,7 +318,7 @@
           <a:p>
             <a:fld id="{5BCAD085-E8A6-8845-BD4E-CB4CCA059FC4}" type="datetimeFigureOut">
               <a:rPr lang="en-US" smtClean="0"/>
-              <a:t>1/27/13</a:t>
+              <a:t>6/20/2026</a:t>
             </a:fld>
             <a:endParaRPr lang="en-US"/>
           </a:p>
@@ -346,7 +360,7 @@
           <a:p>
             <a:fld id="{C1FF6DA9-008F-8B48-92A6-B652298478BF}" type="slidenum">
               <a:rPr lang="en-US" smtClean="0"/>
-              <a:t>‹#›</a:t>
+              <a:t>‹N°›</a:t>
             </a:fld>
             <a:endParaRPr lang="en-US"/>
           </a:p>
@@ -398,10 +412,9 @@
           <a:lstStyle/>
           <a:p>
             <a:r>
-              <a:rPr lang="en-US" smtClean="0"/>
+              <a:rPr lang="en-US"/>
               <a:t>Click to edit Master title style</a:t>
             </a:r>
-            <a:endParaRPr lang="en-US"/>
           </a:p>
         </p:txBody>
       </p:sp>
@@ -422,38 +435,37 @@
           <a:p>
             <a:pPr lvl="0"/>
             <a:r>
-              <a:rPr lang="en-US" smtClean="0"/>
+              <a:rPr lang="en-US"/>
               <a:t>Click to edit Master text styles</a:t>
             </a:r>
           </a:p>
           <a:p>
             <a:pPr lvl="1"/>
             <a:r>
-              <a:rPr lang="en-US" smtClean="0"/>
+              <a:rPr lang="en-US"/>
               <a:t>Second level</a:t>
             </a:r>
           </a:p>
           <a:p>
             <a:pPr lvl="2"/>
             <a:r>
-              <a:rPr lang="en-US" smtClean="0"/>
+              <a:rPr lang="en-US"/>
               <a:t>Third level</a:t>
             </a:r>
           </a:p>
           <a:p>
             <a:pPr lvl="3"/>
             <a:r>
-              <a:rPr lang="en-US" smtClean="0"/>
+              <a:rPr lang="en-US"/>
               <a:t>Fourth level</a:t>
             </a:r>
           </a:p>
           <a:p>
             <a:pPr lvl="4"/>
             <a:r>
-              <a:rPr lang="en-US" smtClean="0"/>
+              <a:rPr lang="en-US"/>
               <a:t>Fifth level</a:t>
             </a:r>
-            <a:endParaRPr lang="en-US"/>
           </a:p>
         </p:txBody>
       </p:sp>
@@ -474,7 +486,7 @@
           <a:p>
             <a:fld id="{5BCAD085-E8A6-8845-BD4E-CB4CCA059FC4}" type="datetimeFigureOut">
               <a:rPr lang="en-US" smtClean="0"/>
-              <a:t>1/27/13</a:t>
+              <a:t>6/20/2026</a:t>
             </a:fld>
             <a:endParaRPr lang="en-US"/>
           </a:p>
@@ -516,7 +528,7 @@
           <a:p>
             <a:fld id="{C1FF6DA9-008F-8B48-92A6-B652298478BF}" type="slidenum">
               <a:rPr lang="en-US" smtClean="0"/>
-              <a:t>‹#›</a:t>
+              <a:t>‹N°›</a:t>
             </a:fld>
             <a:endParaRPr lang="en-US"/>
           </a:p>
@@ -573,10 +585,9 @@
           <a:lstStyle/>
           <a:p>
             <a:r>
-              <a:rPr lang="en-US" smtClean="0"/>
+              <a:rPr lang="en-US"/>
               <a:t>Click to edit Master title style</a:t>
             </a:r>
-            <a:endParaRPr lang="en-US"/>
           </a:p>
         </p:txBody>
       </p:sp>
@@ -602,38 +613,37 @@
           <a:p>
             <a:pPr lvl="0"/>
             <a:r>
-              <a:rPr lang="en-US" smtClean="0"/>
+              <a:rPr lang="en-US"/>
               <a:t>Click to edit Master text styles</a:t>
             </a:r>
           </a:p>
           <a:p>
             <a:pPr lvl="1"/>
             <a:r>
-              <a:rPr lang="en-US" smtClean="0"/>
+              <a:rPr lang="en-US"/>
               <a:t>Second level</a:t>
             </a:r>
           </a:p>
           <a:p>
             <a:pPr lvl="2"/>
             <a:r>
-              <a:rPr lang="en-US" smtClean="0"/>
+              <a:rPr lang="en-US"/>
               <a:t>Third level</a:t>
             </a:r>
           </a:p>
           <a:p>
             <a:pPr lvl="3"/>
             <a:r>
-              <a:rPr lang="en-US" smtClean="0"/>
+              <a:rPr lang="en-US"/>
               <a:t>Fourth level</a:t>
             </a:r>
           </a:p>
           <a:p>
             <a:pPr lvl="4"/>
             <a:r>
-              <a:rPr lang="en-US" smtClean="0"/>
+              <a:rPr lang="en-US"/>
               <a:t>Fifth level</a:t>
             </a:r>
-            <a:endParaRPr lang="en-US"/>
           </a:p>
         </p:txBody>
       </p:sp>
@@ -654,7 +664,7 @@
           <a:p>
             <a:fld id="{5BCAD085-E8A6-8845-BD4E-CB4CCA059FC4}" type="datetimeFigureOut">
               <a:rPr lang="en-US" smtClean="0"/>
-              <a:t>1/27/13</a:t>
+              <a:t>6/20/2026</a:t>
             </a:fld>
             <a:endParaRPr lang="en-US"/>
           </a:p>
@@ -696,7 +706,7 @@
           <a:p>
             <a:fld id="{C1FF6DA9-008F-8B48-92A6-B652298478BF}" type="slidenum">
               <a:rPr lang="en-US" smtClean="0"/>
-              <a:t>‹#›</a:t>
+              <a:t>‹N°›</a:t>
             </a:fld>
             <a:endParaRPr lang="en-US"/>
           </a:p>
@@ -748,10 +758,9 @@
           <a:lstStyle/>
           <a:p>
             <a:r>
-              <a:rPr lang="en-US" smtClean="0"/>
+              <a:rPr lang="en-US"/>
               <a:t>Click to edit Master title style</a:t>
             </a:r>
-            <a:endParaRPr lang="en-US"/>
           </a:p>
         </p:txBody>
       </p:sp>
@@ -772,38 +781,37 @@
           <a:p>
             <a:pPr lvl="0"/>
             <a:r>
-              <a:rPr lang="en-US" smtClean="0"/>
+              <a:rPr lang="en-US"/>
               <a:t>Click to edit Master text styles</a:t>
             </a:r>
           </a:p>
           <a:p>
             <a:pPr lvl="1"/>
             <a:r>
-              <a:rPr lang="en-US" smtClean="0"/>
+              <a:rPr lang="en-US"/>
               <a:t>Second level</a:t>
             </a:r>
           </a:p>
           <a:p>
             <a:pPr lvl="2"/>
             <a:r>
-              <a:rPr lang="en-US" smtClean="0"/>
+              <a:rPr lang="en-US"/>
               <a:t>Third level</a:t>
             </a:r>
           </a:p>
           <a:p>
             <a:pPr lvl="3"/>
             <a:r>
-              <a:rPr lang="en-US" smtClean="0"/>
+              <a:rPr lang="en-US"/>
               <a:t>Fourth level</a:t>
             </a:r>
           </a:p>
           <a:p>
             <a:pPr lvl="4"/>
             <a:r>
-              <a:rPr lang="en-US" smtClean="0"/>
+              <a:rPr lang="en-US"/>
               <a:t>Fifth level</a:t>
             </a:r>
-            <a:endParaRPr lang="en-US"/>
           </a:p>
         </p:txBody>
       </p:sp>
@@ -824,7 +832,7 @@
           <a:p>
             <a:fld id="{5BCAD085-E8A6-8845-BD4E-CB4CCA059FC4}" type="datetimeFigureOut">
               <a:rPr lang="en-US" smtClean="0"/>
-              <a:t>1/27/13</a:t>
+              <a:t>6/20/2026</a:t>
             </a:fld>
             <a:endParaRPr lang="en-US"/>
           </a:p>
@@ -866,7 +874,7 @@
           <a:p>
             <a:fld id="{C1FF6DA9-008F-8B48-92A6-B652298478BF}" type="slidenum">
               <a:rPr lang="en-US" smtClean="0"/>
-              <a:t>‹#›</a:t>
+              <a:t>‹N°›</a:t>
             </a:fld>
             <a:endParaRPr lang="en-US"/>
           </a:p>
@@ -927,10 +935,9 @@
           </a:lstStyle>
           <a:p>
             <a:r>
-              <a:rPr lang="en-US" smtClean="0"/>
+              <a:rPr lang="en-US"/>
               <a:t>Click to edit Master title style</a:t>
             </a:r>
-            <a:endParaRPr lang="en-US"/>
           </a:p>
         </p:txBody>
       </p:sp>
@@ -1047,7 +1054,7 @@
           <a:p>
             <a:pPr lvl="0"/>
             <a:r>
-              <a:rPr lang="en-US" smtClean="0"/>
+              <a:rPr lang="en-US"/>
               <a:t>Click to edit Master text styles</a:t>
             </a:r>
           </a:p>
@@ -1070,7 +1077,7 @@
           <a:p>
             <a:fld id="{5BCAD085-E8A6-8845-BD4E-CB4CCA059FC4}" type="datetimeFigureOut">
               <a:rPr lang="en-US" smtClean="0"/>
-              <a:t>1/27/13</a:t>
+              <a:t>6/20/2026</a:t>
             </a:fld>
             <a:endParaRPr lang="en-US"/>
           </a:p>
@@ -1112,7 +1119,7 @@
           <a:p>
             <a:fld id="{C1FF6DA9-008F-8B48-92A6-B652298478BF}" type="slidenum">
               <a:rPr lang="en-US" smtClean="0"/>
-              <a:t>‹#›</a:t>
+              <a:t>‹N°›</a:t>
             </a:fld>
             <a:endParaRPr lang="en-US"/>
           </a:p>
@@ -1164,10 +1171,9 @@
           <a:lstStyle/>
           <a:p>
             <a:r>
-              <a:rPr lang="en-US" smtClean="0"/>
+              <a:rPr lang="en-US"/>
               <a:t>Click to edit Master title style</a:t>
             </a:r>
-            <a:endParaRPr lang="en-US"/>
           </a:p>
         </p:txBody>
       </p:sp>
@@ -1221,38 +1227,37 @@
           <a:p>
             <a:pPr lvl="0"/>
             <a:r>
-              <a:rPr lang="en-US" smtClean="0"/>
+              <a:rPr lang="en-US"/>
               <a:t>Click to edit Master text styles</a:t>
             </a:r>
           </a:p>
           <a:p>
             <a:pPr lvl="1"/>
             <a:r>
-              <a:rPr lang="en-US" smtClean="0"/>
+              <a:rPr lang="en-US"/>
               <a:t>Second level</a:t>
             </a:r>
           </a:p>
           <a:p>
             <a:pPr lvl="2"/>
             <a:r>
-              <a:rPr lang="en-US" smtClean="0"/>
+              <a:rPr lang="en-US"/>
               <a:t>Third level</a:t>
             </a:r>
           </a:p>
           <a:p>
             <a:pPr lvl="3"/>
             <a:r>
-              <a:rPr lang="en-US" smtClean="0"/>
+              <a:rPr lang="en-US"/>
               <a:t>Fourth level</a:t>
             </a:r>
           </a:p>
           <a:p>
             <a:pPr lvl="4"/>
             <a:r>
-              <a:rPr lang="en-US" smtClean="0"/>
+              <a:rPr lang="en-US"/>
               <a:t>Fifth level</a:t>
             </a:r>
-            <a:endParaRPr lang="en-US"/>
           </a:p>
         </p:txBody>
       </p:sp>
@@ -1306,38 +1311,37 @@
           <a:p>
             <a:pPr lvl="0"/>
             <a:r>
-              <a:rPr lang="en-US" smtClean="0"/>
+              <a:rPr lang="en-US"/>
               <a:t>Click to edit Master text styles</a:t>
             </a:r>
           </a:p>
           <a:p>
             <a:pPr lvl="1"/>
             <a:r>
-              <a:rPr lang="en-US" smtClean="0"/>
+              <a:rPr lang="en-US"/>
               <a:t>Second level</a:t>
             </a:r>
           </a:p>
           <a:p>
             <a:pPr lvl="2"/>
             <a:r>
-              <a:rPr lang="en-US" smtClean="0"/>
+              <a:rPr lang="en-US"/>
               <a:t>Third level</a:t>
             </a:r>
           </a:p>
           <a:p>
             <a:pPr lvl="3"/>
             <a:r>
-              <a:rPr lang="en-US" smtClean="0"/>
+              <a:rPr lang="en-US"/>
               <a:t>Fourth level</a:t>
             </a:r>
           </a:p>
           <a:p>
             <a:pPr lvl="4"/>
             <a:r>
-              <a:rPr lang="en-US" smtClean="0"/>
+              <a:rPr lang="en-US"/>
               <a:t>Fifth level</a:t>
             </a:r>
-            <a:endParaRPr lang="en-US"/>
           </a:p>
         </p:txBody>
       </p:sp>
@@ -1358,7 +1362,7 @@
           <a:p>
             <a:fld id="{5BCAD085-E8A6-8845-BD4E-CB4CCA059FC4}" type="datetimeFigureOut">
               <a:rPr lang="en-US" smtClean="0"/>
-              <a:t>1/27/13</a:t>
+              <a:t>6/20/2026</a:t>
             </a:fld>
             <a:endParaRPr lang="en-US"/>
           </a:p>
@@ -1400,7 +1404,7 @@
           <a:p>
             <a:fld id="{C1FF6DA9-008F-8B48-92A6-B652298478BF}" type="slidenum">
               <a:rPr lang="en-US" smtClean="0"/>
-              <a:t>‹#›</a:t>
+              <a:t>‹N°›</a:t>
             </a:fld>
             <a:endParaRPr lang="en-US"/>
           </a:p>
@@ -1456,10 +1460,9 @@
           </a:lstStyle>
           <a:p>
             <a:r>
-              <a:rPr lang="en-US" smtClean="0"/>
+              <a:rPr lang="en-US"/>
               <a:t>Click to edit Master title style</a:t>
             </a:r>
-            <a:endParaRPr lang="en-US"/>
           </a:p>
         </p:txBody>
       </p:sp>
@@ -1522,7 +1525,7 @@
           <a:p>
             <a:pPr lvl="0"/>
             <a:r>
-              <a:rPr lang="en-US" smtClean="0"/>
+              <a:rPr lang="en-US"/>
               <a:t>Click to edit Master text styles</a:t>
             </a:r>
           </a:p>
@@ -1578,38 +1581,37 @@
           <a:p>
             <a:pPr lvl="0"/>
             <a:r>
-              <a:rPr lang="en-US" smtClean="0"/>
+              <a:rPr lang="en-US"/>
               <a:t>Click to edit Master text styles</a:t>
             </a:r>
           </a:p>
           <a:p>
             <a:pPr lvl="1"/>
             <a:r>
-              <a:rPr lang="en-US" smtClean="0"/>
+              <a:rPr lang="en-US"/>
               <a:t>Second level</a:t>
             </a:r>
           </a:p>
           <a:p>
             <a:pPr lvl="2"/>
             <a:r>
-              <a:rPr lang="en-US" smtClean="0"/>
+              <a:rPr lang="en-US"/>
               <a:t>Third level</a:t>
             </a:r>
           </a:p>
           <a:p>
             <a:pPr lvl="3"/>
             <a:r>
-              <a:rPr lang="en-US" smtClean="0"/>
+              <a:rPr lang="en-US"/>
               <a:t>Fourth level</a:t>
             </a:r>
           </a:p>
           <a:p>
             <a:pPr lvl="4"/>
             <a:r>
-              <a:rPr lang="en-US" smtClean="0"/>
+              <a:rPr lang="en-US"/>
               <a:t>Fifth level</a:t>
             </a:r>
-            <a:endParaRPr lang="en-US"/>
           </a:p>
         </p:txBody>
       </p:sp>
@@ -1672,7 +1674,7 @@
           <a:p>
             <a:pPr lvl="0"/>
             <a:r>
-              <a:rPr lang="en-US" smtClean="0"/>
+              <a:rPr lang="en-US"/>
               <a:t>Click to edit Master text styles</a:t>
             </a:r>
           </a:p>
@@ -1728,38 +1730,37 @@
           <a:p>
             <a:pPr lvl="0"/>
             <a:r>
-              <a:rPr lang="en-US" smtClean="0"/>
+              <a:rPr lang="en-US"/>
               <a:t>Click to edit Master text styles</a:t>
             </a:r>
           </a:p>
           <a:p>
             <a:pPr lvl="1"/>
             <a:r>
-              <a:rPr lang="en-US" smtClean="0"/>
+              <a:rPr lang="en-US"/>
               <a:t>Second level</a:t>
             </a:r>
           </a:p>
           <a:p>
             <a:pPr lvl="2"/>
             <a:r>
-              <a:rPr lang="en-US" smtClean="0"/>
+              <a:rPr lang="en-US"/>
               <a:t>Third level</a:t>
             </a:r>
           </a:p>
           <a:p>
             <a:pPr lvl="3"/>
             <a:r>
-              <a:rPr lang="en-US" smtClean="0"/>
+              <a:rPr lang="en-US"/>
               <a:t>Fourth level</a:t>
             </a:r>
           </a:p>
           <a:p>
             <a:pPr lvl="4"/>
             <a:r>
-              <a:rPr lang="en-US" smtClean="0"/>
+              <a:rPr lang="en-US"/>
               <a:t>Fifth level</a:t>
             </a:r>
-            <a:endParaRPr lang="en-US"/>
           </a:p>
         </p:txBody>
       </p:sp>
@@ -1780,7 +1781,7 @@
           <a:p>
             <a:fld id="{5BCAD085-E8A6-8845-BD4E-CB4CCA059FC4}" type="datetimeFigureOut">
               <a:rPr lang="en-US" smtClean="0"/>
-              <a:t>1/27/13</a:t>
+              <a:t>6/20/2026</a:t>
             </a:fld>
             <a:endParaRPr lang="en-US"/>
           </a:p>
@@ -1822,7 +1823,7 @@
           <a:p>
             <a:fld id="{C1FF6DA9-008F-8B48-92A6-B652298478BF}" type="slidenum">
               <a:rPr lang="en-US" smtClean="0"/>
-              <a:t>‹#›</a:t>
+              <a:t>‹N°›</a:t>
             </a:fld>
             <a:endParaRPr lang="en-US"/>
           </a:p>
@@ -1874,10 +1875,9 @@
           <a:lstStyle/>
           <a:p>
             <a:r>
-              <a:rPr lang="en-US" smtClean="0"/>
+              <a:rPr lang="en-US"/>
               <a:t>Click to edit Master title style</a:t>
             </a:r>
-            <a:endParaRPr lang="en-US"/>
           </a:p>
         </p:txBody>
       </p:sp>
@@ -1898,7 +1898,7 @@
           <a:p>
             <a:fld id="{5BCAD085-E8A6-8845-BD4E-CB4CCA059FC4}" type="datetimeFigureOut">
               <a:rPr lang="en-US" smtClean="0"/>
-              <a:t>1/27/13</a:t>
+              <a:t>6/20/2026</a:t>
             </a:fld>
             <a:endParaRPr lang="en-US"/>
           </a:p>
@@ -1940,7 +1940,7 @@
           <a:p>
             <a:fld id="{C1FF6DA9-008F-8B48-92A6-B652298478BF}" type="slidenum">
               <a:rPr lang="en-US" smtClean="0"/>
-              <a:t>‹#›</a:t>
+              <a:t>‹N°›</a:t>
             </a:fld>
             <a:endParaRPr lang="en-US"/>
           </a:p>
@@ -1993,7 +1993,7 @@
           <a:p>
             <a:fld id="{5BCAD085-E8A6-8845-BD4E-CB4CCA059FC4}" type="datetimeFigureOut">
               <a:rPr lang="en-US" smtClean="0"/>
-              <a:t>1/27/13</a:t>
+              <a:t>6/20/2026</a:t>
             </a:fld>
             <a:endParaRPr lang="en-US"/>
           </a:p>
@@ -2035,7 +2035,7 @@
           <a:p>
             <a:fld id="{C1FF6DA9-008F-8B48-92A6-B652298478BF}" type="slidenum">
               <a:rPr lang="en-US" smtClean="0"/>
-              <a:t>‹#›</a:t>
+              <a:t>‹N°›</a:t>
             </a:fld>
             <a:endParaRPr lang="en-US"/>
           </a:p>
@@ -2096,10 +2096,9 @@
           </a:lstStyle>
           <a:p>
             <a:r>
-              <a:rPr lang="en-US" smtClean="0"/>
+              <a:rPr lang="en-US"/>
               <a:t>Click to edit Master title style</a:t>
             </a:r>
-            <a:endParaRPr lang="en-US"/>
           </a:p>
         </p:txBody>
       </p:sp>
@@ -2153,38 +2152,37 @@
           <a:p>
             <a:pPr lvl="0"/>
             <a:r>
-              <a:rPr lang="en-US" smtClean="0"/>
+              <a:rPr lang="en-US"/>
               <a:t>Click to edit Master text styles</a:t>
             </a:r>
           </a:p>
           <a:p>
             <a:pPr lvl="1"/>
             <a:r>
-              <a:rPr lang="en-US" smtClean="0"/>
+              <a:rPr lang="en-US"/>
               <a:t>Second level</a:t>
             </a:r>
           </a:p>
           <a:p>
             <a:pPr lvl="2"/>
             <a:r>
-              <a:rPr lang="en-US" smtClean="0"/>
+              <a:rPr lang="en-US"/>
               <a:t>Third level</a:t>
             </a:r>
           </a:p>
           <a:p>
             <a:pPr lvl="3"/>
             <a:r>
-              <a:rPr lang="en-US" smtClean="0"/>
+              <a:rPr lang="en-US"/>
               <a:t>Fourth level</a:t>
             </a:r>
           </a:p>
           <a:p>
             <a:pPr lvl="4"/>
             <a:r>
-              <a:rPr lang="en-US" smtClean="0"/>
+              <a:rPr lang="en-US"/>
               <a:t>Fifth level</a:t>
             </a:r>
-            <a:endParaRPr lang="en-US"/>
           </a:p>
         </p:txBody>
       </p:sp>
@@ -2247,7 +2245,7 @@
           <a:p>
             <a:pPr lvl="0"/>
             <a:r>
-              <a:rPr lang="en-US" smtClean="0"/>
+              <a:rPr lang="en-US"/>
               <a:t>Click to edit Master text styles</a:t>
             </a:r>
           </a:p>
@@ -2270,7 +2268,7 @@
           <a:p>
             <a:fld id="{5BCAD085-E8A6-8845-BD4E-CB4CCA059FC4}" type="datetimeFigureOut">
               <a:rPr lang="en-US" smtClean="0"/>
-              <a:t>1/27/13</a:t>
+              <a:t>6/20/2026</a:t>
             </a:fld>
             <a:endParaRPr lang="en-US"/>
           </a:p>
@@ -2312,7 +2310,7 @@
           <a:p>
             <a:fld id="{C1FF6DA9-008F-8B48-92A6-B652298478BF}" type="slidenum">
               <a:rPr lang="en-US" smtClean="0"/>
-              <a:t>‹#›</a:t>
+              <a:t>‹N°›</a:t>
             </a:fld>
             <a:endParaRPr lang="en-US"/>
           </a:p>
@@ -2373,10 +2371,9 @@
           </a:lstStyle>
           <a:p>
             <a:r>
-              <a:rPr lang="en-US" smtClean="0"/>
+              <a:rPr lang="en-US"/>
               <a:t>Click to edit Master title style</a:t>
             </a:r>
-            <a:endParaRPr lang="en-US"/>
           </a:p>
         </p:txBody>
       </p:sp>
@@ -2500,7 +2497,7 @@
           <a:p>
             <a:pPr lvl="0"/>
             <a:r>
-              <a:rPr lang="en-US" smtClean="0"/>
+              <a:rPr lang="en-US"/>
               <a:t>Click to edit Master text styles</a:t>
             </a:r>
           </a:p>
@@ -2523,7 +2520,7 @@
           <a:p>
             <a:fld id="{5BCAD085-E8A6-8845-BD4E-CB4CCA059FC4}" type="datetimeFigureOut">
               <a:rPr lang="en-US" smtClean="0"/>
-              <a:t>1/27/13</a:t>
+              <a:t>6/20/2026</a:t>
             </a:fld>
             <a:endParaRPr lang="en-US"/>
           </a:p>
@@ -2565,7 +2562,7 @@
           <a:p>
             <a:fld id="{C1FF6DA9-008F-8B48-92A6-B652298478BF}" type="slidenum">
               <a:rPr lang="en-US" smtClean="0"/>
-              <a:t>‹#›</a:t>
+              <a:t>‹N°›</a:t>
             </a:fld>
             <a:endParaRPr lang="en-US"/>
           </a:p>
@@ -2632,10 +2629,9 @@
           <a:lstStyle/>
           <a:p>
             <a:r>
-              <a:rPr lang="en-US" smtClean="0"/>
+              <a:rPr lang="en-US"/>
               <a:t>Click to edit Master title style</a:t>
             </a:r>
-            <a:endParaRPr lang="en-US"/>
           </a:p>
         </p:txBody>
       </p:sp>
@@ -2666,38 +2662,37 @@
           <a:p>
             <a:pPr lvl="0"/>
             <a:r>
-              <a:rPr lang="en-US" smtClean="0"/>
+              <a:rPr lang="en-US"/>
               <a:t>Click to edit Master text styles</a:t>
             </a:r>
           </a:p>
           <a:p>
             <a:pPr lvl="1"/>
             <a:r>
-              <a:rPr lang="en-US" smtClean="0"/>
+              <a:rPr lang="en-US"/>
               <a:t>Second level</a:t>
             </a:r>
           </a:p>
           <a:p>
             <a:pPr lvl="2"/>
             <a:r>
-              <a:rPr lang="en-US" smtClean="0"/>
+              <a:rPr lang="en-US"/>
               <a:t>Third level</a:t>
             </a:r>
           </a:p>
           <a:p>
             <a:pPr lvl="3"/>
             <a:r>
-              <a:rPr lang="en-US" smtClean="0"/>
+              <a:rPr lang="en-US"/>
               <a:t>Fourth level</a:t>
             </a:r>
           </a:p>
           <a:p>
             <a:pPr lvl="4"/>
             <a:r>
-              <a:rPr lang="en-US" smtClean="0"/>
+              <a:rPr lang="en-US"/>
               <a:t>Fifth level</a:t>
             </a:r>
-            <a:endParaRPr lang="en-US"/>
           </a:p>
         </p:txBody>
       </p:sp>
@@ -2736,7 +2731,7 @@
           <a:p>
             <a:fld id="{5BCAD085-E8A6-8845-BD4E-CB4CCA059FC4}" type="datetimeFigureOut">
               <a:rPr lang="en-US" smtClean="0"/>
-              <a:t>1/27/13</a:t>
+              <a:t>6/20/2026</a:t>
             </a:fld>
             <a:endParaRPr lang="en-US"/>
           </a:p>
@@ -2814,7 +2809,7 @@
           <a:p>
             <a:fld id="{C1FF6DA9-008F-8B48-92A6-B652298478BF}" type="slidenum">
               <a:rPr lang="en-US" smtClean="0"/>
-              <a:t>‹#›</a:t>
+              <a:t>‹N°›</a:t>
             </a:fld>
             <a:endParaRPr lang="en-US"/>
           </a:p>
@@ -3095,7 +3090,7 @@
 </file>
 
 <file path=ppt/slides/slide1.xml><?xml version="1.0" encoding="utf-8"?>
-<p:sld xmlns:a="http://schemas.openxmlformats.org/drawingml/2006/main" xmlns:p="http://schemas.openxmlformats.org/presentationml/2006/main" xmlns:r="http://schemas.openxmlformats.org/officeDocument/2006/relationships">
+<p:sld xmlns:a="http://schemas.openxmlformats.org/drawingml/2006/main" xmlns:r="http://schemas.openxmlformats.org/officeDocument/2006/relationships" xmlns:p="http://schemas.openxmlformats.org/presentationml/2006/main">
   <p:cSld>
     <p:bg>
       <p:bgPr>
@@ -3111,7 +3106,14 @@
         <p:cNvGrpSpPr/>
         <p:nvPr/>
       </p:nvGrpSpPr>
-      <p:grpSpPr/>
+      <p:grpSpPr>
+        <a:xfrm>
+          <a:off x="0" y="0"/>
+          <a:ext cx="0" cy="0"/>
+          <a:chOff x="0" y="0"/>
+          <a:chExt cx="0" cy="0"/>
+        </a:xfrm>
+      </p:grpSpPr>
       <p:sp>
         <p:nvSpPr>
           <p:cNvPr id="2" name="TextBox 1"/>
@@ -3135,7 +3137,7 @@
           <a:lstStyle/>
           <a:p>
             <a:pPr algn="ctr">
-              <a:defRPr b="1" sz="6400">
+              <a:defRPr sz="6400" b="1">
                 <a:solidFill>
                   <a:srgbClr val="0055FF"/>
                 </a:solidFill>
@@ -3171,7 +3173,7 @@
           <a:lstStyle/>
           <a:p>
             <a:pPr algn="ctr">
-              <a:defRPr b="1" sz="2000">
+              <a:defRPr sz="2000" b="1">
                 <a:solidFill>
                   <a:srgbClr val="0A2540"/>
                 </a:solidFill>
@@ -3192,8 +3194,8 @@
         </p:nvSpPr>
         <p:spPr>
           <a:xfrm>
-            <a:off x="457200" y="5029200"/>
-            <a:ext cx="11277295" cy="914400"/>
+            <a:off x="2353060" y="5029200"/>
+            <a:ext cx="7485575" cy="523220"/>
           </a:xfrm>
           <a:prstGeom prst="rect">
             <a:avLst/>
@@ -3215,11 +3217,75 @@
               </a:defRPr>
             </a:pPr>
             <a:r>
-              <a:t>Nizar Baloubali • Manal Es-sobhy • Anas El Maslouti • Nouamane Chaibi • Amine Ait Hamma</a:t>
-            </a:r>
-            <a:br/>
-            <a:r>
-              <a:t>Encadré par : Mr. El Hajji</a:t>
+              <a:rPr dirty="0"/>
+              <a:t>Nizar </a:t>
+            </a:r>
+            <a:r>
+              <a:rPr dirty="0" err="1"/>
+              <a:t>Baloubali</a:t>
+            </a:r>
+            <a:r>
+              <a:rPr dirty="0"/>
+              <a:t> • Manal Es-</a:t>
+            </a:r>
+            <a:r>
+              <a:rPr dirty="0" err="1"/>
+              <a:t>sobhy</a:t>
+            </a:r>
+            <a:r>
+              <a:rPr dirty="0"/>
+              <a:t> • Anas El </a:t>
+            </a:r>
+            <a:r>
+              <a:rPr dirty="0" err="1"/>
+              <a:t>Maslouti</a:t>
+            </a:r>
+            <a:r>
+              <a:rPr dirty="0"/>
+              <a:t> • </a:t>
+            </a:r>
+            <a:r>
+              <a:rPr dirty="0" err="1"/>
+              <a:t>Nouaman</a:t>
+            </a:r>
+            <a:r>
+              <a:rPr dirty="0"/>
+              <a:t> Ch</a:t>
+            </a:r>
+            <a:r>
+              <a:rPr lang="fr-FR" dirty="0"/>
+              <a:t>a</a:t>
+            </a:r>
+            <a:r>
+              <a:rPr dirty="0" err="1"/>
+              <a:t>aibi</a:t>
+            </a:r>
+            <a:r>
+              <a:rPr dirty="0"/>
+              <a:t> • Amine </a:t>
+            </a:r>
+            <a:r>
+              <a:rPr dirty="0" err="1"/>
+              <a:t>Ait</a:t>
+            </a:r>
+            <a:r>
+              <a:rPr dirty="0"/>
+              <a:t> </a:t>
+            </a:r>
+            <a:r>
+              <a:rPr dirty="0" err="1"/>
+              <a:t>Hamma</a:t>
+            </a:r>
+            <a:br>
+              <a:rPr dirty="0"/>
+            </a:br>
+            <a:r>
+              <a:rPr dirty="0" err="1"/>
+              <a:t>Encadré</a:t>
+            </a:r>
+            <a:r>
+              <a:rPr dirty="0"/>
+              <a:t> par : Mr. El Hajji</a:t>
             </a:r>
           </a:p>
         </p:txBody>
@@ -3233,7 +3299,7 @@
 </file>
 
 <file path=ppt/slides/slide10.xml><?xml version="1.0" encoding="utf-8"?>
-<p:sld xmlns:a="http://schemas.openxmlformats.org/drawingml/2006/main" xmlns:p="http://schemas.openxmlformats.org/presentationml/2006/main" xmlns:r="http://schemas.openxmlformats.org/officeDocument/2006/relationships">
+<p:sld xmlns:a="http://schemas.openxmlformats.org/drawingml/2006/main" xmlns:r="http://schemas.openxmlformats.org/officeDocument/2006/relationships" xmlns:p="http://schemas.openxmlformats.org/presentationml/2006/main">
   <p:cSld>
     <p:bg>
       <p:bgPr>
@@ -3249,7 +3315,14 @@
         <p:cNvGrpSpPr/>
         <p:nvPr/>
       </p:nvGrpSpPr>
-      <p:grpSpPr/>
+      <p:grpSpPr>
+        <a:xfrm>
+          <a:off x="0" y="0"/>
+          <a:ext cx="0" cy="0"/>
+          <a:chOff x="0" y="0"/>
+          <a:chExt cx="0" cy="0"/>
+        </a:xfrm>
+      </p:grpSpPr>
       <p:sp>
         <p:nvSpPr>
           <p:cNvPr id="2" name="TextBox 1"/>
@@ -3273,7 +3346,7 @@
           <a:lstStyle/>
           <a:p>
             <a:pPr>
-              <a:defRPr b="1" sz="2800">
+              <a:defRPr sz="2800" b="1">
                 <a:solidFill>
                   <a:srgbClr val="0A2540"/>
                 </a:solidFill>
@@ -3390,7 +3463,7 @@
 </file>
 
 <file path=ppt/slides/slide11.xml><?xml version="1.0" encoding="utf-8"?>
-<p:sld xmlns:a="http://schemas.openxmlformats.org/drawingml/2006/main" xmlns:p="http://schemas.openxmlformats.org/presentationml/2006/main" xmlns:r="http://schemas.openxmlformats.org/officeDocument/2006/relationships">
+<p:sld xmlns:a="http://schemas.openxmlformats.org/drawingml/2006/main" xmlns:r="http://schemas.openxmlformats.org/officeDocument/2006/relationships" xmlns:p="http://schemas.openxmlformats.org/presentationml/2006/main">
   <p:cSld>
     <p:bg>
       <p:bgPr>
@@ -3406,7 +3479,14 @@
         <p:cNvGrpSpPr/>
         <p:nvPr/>
       </p:nvGrpSpPr>
-      <p:grpSpPr/>
+      <p:grpSpPr>
+        <a:xfrm>
+          <a:off x="0" y="0"/>
+          <a:ext cx="0" cy="0"/>
+          <a:chOff x="0" y="0"/>
+          <a:chExt cx="0" cy="0"/>
+        </a:xfrm>
+      </p:grpSpPr>
       <p:sp>
         <p:nvSpPr>
           <p:cNvPr id="2" name="TextBox 1"/>
@@ -3430,7 +3510,7 @@
           <a:lstStyle/>
           <a:p>
             <a:pPr>
-              <a:defRPr b="1" sz="2800">
+              <a:defRPr sz="2800" b="1">
                 <a:solidFill>
                   <a:srgbClr val="0A2540"/>
                 </a:solidFill>
@@ -3547,7 +3627,7 @@
 </file>
 
 <file path=ppt/slides/slide12.xml><?xml version="1.0" encoding="utf-8"?>
-<p:sld xmlns:a="http://schemas.openxmlformats.org/drawingml/2006/main" xmlns:p="http://schemas.openxmlformats.org/presentationml/2006/main" xmlns:r="http://schemas.openxmlformats.org/officeDocument/2006/relationships">
+<p:sld xmlns:a="http://schemas.openxmlformats.org/drawingml/2006/main" xmlns:r="http://schemas.openxmlformats.org/officeDocument/2006/relationships" xmlns:p="http://schemas.openxmlformats.org/presentationml/2006/main">
   <p:cSld>
     <p:bg>
       <p:bgPr>
@@ -3563,7 +3643,14 @@
         <p:cNvGrpSpPr/>
         <p:nvPr/>
       </p:nvGrpSpPr>
-      <p:grpSpPr/>
+      <p:grpSpPr>
+        <a:xfrm>
+          <a:off x="0" y="0"/>
+          <a:ext cx="0" cy="0"/>
+          <a:chOff x="0" y="0"/>
+          <a:chExt cx="0" cy="0"/>
+        </a:xfrm>
+      </p:grpSpPr>
       <p:sp>
         <p:nvSpPr>
           <p:cNvPr id="2" name="TextBox 1"/>
@@ -3587,7 +3674,7 @@
           <a:lstStyle/>
           <a:p>
             <a:pPr>
-              <a:defRPr b="1" sz="2800">
+              <a:defRPr sz="2800" b="1">
                 <a:solidFill>
                   <a:srgbClr val="0A2540"/>
                 </a:solidFill>
@@ -3704,7 +3791,7 @@
 </file>
 
 <file path=ppt/slides/slide13.xml><?xml version="1.0" encoding="utf-8"?>
-<p:sld xmlns:a="http://schemas.openxmlformats.org/drawingml/2006/main" xmlns:p="http://schemas.openxmlformats.org/presentationml/2006/main" xmlns:r="http://schemas.openxmlformats.org/officeDocument/2006/relationships">
+<p:sld xmlns:a="http://schemas.openxmlformats.org/drawingml/2006/main" xmlns:r="http://schemas.openxmlformats.org/officeDocument/2006/relationships" xmlns:p="http://schemas.openxmlformats.org/presentationml/2006/main">
   <p:cSld>
     <p:bg>
       <p:bgPr>
@@ -3720,7 +3807,14 @@
         <p:cNvGrpSpPr/>
         <p:nvPr/>
       </p:nvGrpSpPr>
-      <p:grpSpPr/>
+      <p:grpSpPr>
+        <a:xfrm>
+          <a:off x="0" y="0"/>
+          <a:ext cx="0" cy="0"/>
+          <a:chOff x="0" y="0"/>
+          <a:chExt cx="0" cy="0"/>
+        </a:xfrm>
+      </p:grpSpPr>
       <p:sp>
         <p:nvSpPr>
           <p:cNvPr id="2" name="TextBox 1"/>
@@ -3744,7 +3838,7 @@
           <a:lstStyle/>
           <a:p>
             <a:pPr>
-              <a:defRPr b="1" sz="2800">
+              <a:defRPr sz="2800" b="1">
                 <a:solidFill>
                   <a:srgbClr val="0A2540"/>
                 </a:solidFill>
@@ -3861,7 +3955,7 @@
 </file>
 
 <file path=ppt/slides/slide14.xml><?xml version="1.0" encoding="utf-8"?>
-<p:sld xmlns:a="http://schemas.openxmlformats.org/drawingml/2006/main" xmlns:p="http://schemas.openxmlformats.org/presentationml/2006/main" xmlns:r="http://schemas.openxmlformats.org/officeDocument/2006/relationships">
+<p:sld xmlns:a="http://schemas.openxmlformats.org/drawingml/2006/main" xmlns:r="http://schemas.openxmlformats.org/officeDocument/2006/relationships" xmlns:p="http://schemas.openxmlformats.org/presentationml/2006/main">
   <p:cSld>
     <p:bg>
       <p:bgPr>
@@ -3877,7 +3971,14 @@
         <p:cNvGrpSpPr/>
         <p:nvPr/>
       </p:nvGrpSpPr>
-      <p:grpSpPr/>
+      <p:grpSpPr>
+        <a:xfrm>
+          <a:off x="0" y="0"/>
+          <a:ext cx="0" cy="0"/>
+          <a:chOff x="0" y="0"/>
+          <a:chExt cx="0" cy="0"/>
+        </a:xfrm>
+      </p:grpSpPr>
       <p:sp>
         <p:nvSpPr>
           <p:cNvPr id="2" name="TextBox 1"/>
@@ -3901,7 +4002,7 @@
           <a:lstStyle/>
           <a:p>
             <a:pPr>
-              <a:defRPr b="1" sz="2800">
+              <a:defRPr sz="2800" b="1">
                 <a:solidFill>
                   <a:srgbClr val="0A2540"/>
                 </a:solidFill>
@@ -4018,7 +4119,7 @@
 </file>
 
 <file path=ppt/slides/slide15.xml><?xml version="1.0" encoding="utf-8"?>
-<p:sld xmlns:a="http://schemas.openxmlformats.org/drawingml/2006/main" xmlns:p="http://schemas.openxmlformats.org/presentationml/2006/main" xmlns:r="http://schemas.openxmlformats.org/officeDocument/2006/relationships">
+<p:sld xmlns:a="http://schemas.openxmlformats.org/drawingml/2006/main" xmlns:r="http://schemas.openxmlformats.org/officeDocument/2006/relationships" xmlns:p="http://schemas.openxmlformats.org/presentationml/2006/main">
   <p:cSld>
     <p:bg>
       <p:bgPr>
@@ -4034,7 +4135,14 @@
         <p:cNvGrpSpPr/>
         <p:nvPr/>
       </p:nvGrpSpPr>
-      <p:grpSpPr/>
+      <p:grpSpPr>
+        <a:xfrm>
+          <a:off x="0" y="0"/>
+          <a:ext cx="0" cy="0"/>
+          <a:chOff x="0" y="0"/>
+          <a:chExt cx="0" cy="0"/>
+        </a:xfrm>
+      </p:grpSpPr>
       <p:sp>
         <p:nvSpPr>
           <p:cNvPr id="2" name="TextBox 1"/>
@@ -4058,7 +4166,7 @@
           <a:lstStyle/>
           <a:p>
             <a:pPr>
-              <a:defRPr b="1" sz="2800">
+              <a:defRPr sz="2800" b="1">
                 <a:solidFill>
                   <a:srgbClr val="0A2540"/>
                 </a:solidFill>
@@ -4175,7 +4283,7 @@
 </file>
 
 <file path=ppt/slides/slide16.xml><?xml version="1.0" encoding="utf-8"?>
-<p:sld xmlns:a="http://schemas.openxmlformats.org/drawingml/2006/main" xmlns:p="http://schemas.openxmlformats.org/presentationml/2006/main" xmlns:r="http://schemas.openxmlformats.org/officeDocument/2006/relationships">
+<p:sld xmlns:a="http://schemas.openxmlformats.org/drawingml/2006/main" xmlns:r="http://schemas.openxmlformats.org/officeDocument/2006/relationships" xmlns:p="http://schemas.openxmlformats.org/presentationml/2006/main">
   <p:cSld>
     <p:bg>
       <p:bgPr>
@@ -4191,7 +4299,14 @@
         <p:cNvGrpSpPr/>
         <p:nvPr/>
       </p:nvGrpSpPr>
-      <p:grpSpPr/>
+      <p:grpSpPr>
+        <a:xfrm>
+          <a:off x="0" y="0"/>
+          <a:ext cx="0" cy="0"/>
+          <a:chOff x="0" y="0"/>
+          <a:chExt cx="0" cy="0"/>
+        </a:xfrm>
+      </p:grpSpPr>
       <p:sp>
         <p:nvSpPr>
           <p:cNvPr id="2" name="TextBox 1"/>
@@ -4215,7 +4330,7 @@
           <a:lstStyle/>
           <a:p>
             <a:pPr>
-              <a:defRPr b="1" sz="3200">
+              <a:defRPr sz="3200" b="1">
                 <a:solidFill>
                   <a:srgbClr val="0A2540"/>
                 </a:solidFill>
@@ -4318,6 +4433,7 @@
                 <a:latin typeface="Segoe UI"/>
               </a:defRPr>
             </a:pPr>
+            <a:endParaRPr/>
           </a:p>
           <a:p>
             <a:pPr>
@@ -4387,7 +4503,7 @@
 </file>
 
 <file path=ppt/slides/slide17.xml><?xml version="1.0" encoding="utf-8"?>
-<p:sld xmlns:a="http://schemas.openxmlformats.org/drawingml/2006/main" xmlns:p="http://schemas.openxmlformats.org/presentationml/2006/main" xmlns:r="http://schemas.openxmlformats.org/officeDocument/2006/relationships">
+<p:sld xmlns:a="http://schemas.openxmlformats.org/drawingml/2006/main" xmlns:r="http://schemas.openxmlformats.org/officeDocument/2006/relationships" xmlns:p="http://schemas.openxmlformats.org/presentationml/2006/main">
   <p:cSld>
     <p:bg>
       <p:bgPr>
@@ -4403,7 +4519,14 @@
         <p:cNvGrpSpPr/>
         <p:nvPr/>
       </p:nvGrpSpPr>
-      <p:grpSpPr/>
+      <p:grpSpPr>
+        <a:xfrm>
+          <a:off x="0" y="0"/>
+          <a:ext cx="0" cy="0"/>
+          <a:chOff x="0" y="0"/>
+          <a:chExt cx="0" cy="0"/>
+        </a:xfrm>
+      </p:grpSpPr>
       <p:sp>
         <p:nvSpPr>
           <p:cNvPr id="2" name="TextBox 1"/>
@@ -4427,7 +4550,7 @@
           <a:lstStyle/>
           <a:p>
             <a:pPr>
-              <a:defRPr b="1" sz="3200">
+              <a:defRPr sz="3200" b="1">
                 <a:solidFill>
                   <a:srgbClr val="0A2540"/>
                 </a:solidFill>
@@ -4530,6 +4653,7 @@
                 <a:latin typeface="Segoe UI"/>
               </a:defRPr>
             </a:pPr>
+            <a:endParaRPr/>
           </a:p>
           <a:p>
             <a:pPr>
@@ -4584,6 +4708,7 @@
                 <a:latin typeface="Segoe UI"/>
               </a:defRPr>
             </a:pPr>
+            <a:endParaRPr/>
           </a:p>
           <a:p>
             <a:pPr>
@@ -4615,7 +4740,7 @@
 </file>
 
 <file path=ppt/slides/slide2.xml><?xml version="1.0" encoding="utf-8"?>
-<p:sld xmlns:a="http://schemas.openxmlformats.org/drawingml/2006/main" xmlns:p="http://schemas.openxmlformats.org/presentationml/2006/main" xmlns:r="http://schemas.openxmlformats.org/officeDocument/2006/relationships">
+<p:sld xmlns:a="http://schemas.openxmlformats.org/drawingml/2006/main" xmlns:r="http://schemas.openxmlformats.org/officeDocument/2006/relationships" xmlns:p="http://schemas.openxmlformats.org/presentationml/2006/main">
   <p:cSld>
     <p:bg>
       <p:bgPr>
@@ -4631,7 +4756,14 @@
         <p:cNvGrpSpPr/>
         <p:nvPr/>
       </p:nvGrpSpPr>
-      <p:grpSpPr/>
+      <p:grpSpPr>
+        <a:xfrm>
+          <a:off x="0" y="0"/>
+          <a:ext cx="0" cy="0"/>
+          <a:chOff x="0" y="0"/>
+          <a:chExt cx="0" cy="0"/>
+        </a:xfrm>
+      </p:grpSpPr>
       <p:sp>
         <p:nvSpPr>
           <p:cNvPr id="2" name="TextBox 1"/>
@@ -4655,7 +4787,7 @@
           <a:lstStyle/>
           <a:p>
             <a:pPr>
-              <a:defRPr b="1" sz="3200">
+              <a:defRPr sz="3200" b="1">
                 <a:solidFill>
                   <a:srgbClr val="0A2540"/>
                 </a:solidFill>
@@ -4777,6 +4909,7 @@
                 <a:latin typeface="Segoe UI"/>
               </a:defRPr>
             </a:pPr>
+            <a:endParaRPr/>
           </a:p>
           <a:p>
             <a:pPr>
@@ -4831,6 +4964,7 @@
                 <a:latin typeface="Segoe UI"/>
               </a:defRPr>
             </a:pPr>
+            <a:endParaRPr/>
           </a:p>
           <a:p>
             <a:pPr>
@@ -4881,7 +5015,7 @@
 </file>
 
 <file path=ppt/slides/slide3.xml><?xml version="1.0" encoding="utf-8"?>
-<p:sld xmlns:a="http://schemas.openxmlformats.org/drawingml/2006/main" xmlns:p="http://schemas.openxmlformats.org/presentationml/2006/main" xmlns:r="http://schemas.openxmlformats.org/officeDocument/2006/relationships">
+<p:sld xmlns:a="http://schemas.openxmlformats.org/drawingml/2006/main" xmlns:r="http://schemas.openxmlformats.org/officeDocument/2006/relationships" xmlns:p="http://schemas.openxmlformats.org/presentationml/2006/main">
   <p:cSld>
     <p:bg>
       <p:bgPr>
@@ -4897,7 +5031,14 @@
         <p:cNvGrpSpPr/>
         <p:nvPr/>
       </p:nvGrpSpPr>
-      <p:grpSpPr/>
+      <p:grpSpPr>
+        <a:xfrm>
+          <a:off x="0" y="0"/>
+          <a:ext cx="0" cy="0"/>
+          <a:chOff x="0" y="0"/>
+          <a:chExt cx="0" cy="0"/>
+        </a:xfrm>
+      </p:grpSpPr>
       <p:sp>
         <p:nvSpPr>
           <p:cNvPr id="2" name="TextBox 1"/>
@@ -4921,7 +5062,7 @@
           <a:lstStyle/>
           <a:p>
             <a:pPr>
-              <a:defRPr b="1" sz="3200">
+              <a:defRPr sz="3200" b="1">
                 <a:solidFill>
                   <a:srgbClr val="0A2540"/>
                 </a:solidFill>
@@ -5024,6 +5165,7 @@
                 <a:latin typeface="Segoe UI"/>
               </a:defRPr>
             </a:pPr>
+            <a:endParaRPr/>
           </a:p>
           <a:p>
             <a:pPr>
@@ -5093,7 +5235,7 @@
 </file>
 
 <file path=ppt/slides/slide4.xml><?xml version="1.0" encoding="utf-8"?>
-<p:sld xmlns:a="http://schemas.openxmlformats.org/drawingml/2006/main" xmlns:p="http://schemas.openxmlformats.org/presentationml/2006/main" xmlns:r="http://schemas.openxmlformats.org/officeDocument/2006/relationships">
+<p:sld xmlns:a="http://schemas.openxmlformats.org/drawingml/2006/main" xmlns:r="http://schemas.openxmlformats.org/officeDocument/2006/relationships" xmlns:p="http://schemas.openxmlformats.org/presentationml/2006/main">
   <p:cSld>
     <p:bg>
       <p:bgPr>
@@ -5109,7 +5251,14 @@
         <p:cNvGrpSpPr/>
         <p:nvPr/>
       </p:nvGrpSpPr>
-      <p:grpSpPr/>
+      <p:grpSpPr>
+        <a:xfrm>
+          <a:off x="0" y="0"/>
+          <a:ext cx="0" cy="0"/>
+          <a:chOff x="0" y="0"/>
+          <a:chExt cx="0" cy="0"/>
+        </a:xfrm>
+      </p:grpSpPr>
       <p:sp>
         <p:nvSpPr>
           <p:cNvPr id="2" name="TextBox 1"/>
@@ -5133,7 +5282,7 @@
           <a:lstStyle/>
           <a:p>
             <a:pPr>
-              <a:defRPr b="1" sz="3200">
+              <a:defRPr sz="3200" b="1">
                 <a:solidFill>
                   <a:srgbClr val="0A2540"/>
                 </a:solidFill>
@@ -5236,6 +5385,7 @@
                 <a:latin typeface="Segoe UI"/>
               </a:defRPr>
             </a:pPr>
+            <a:endParaRPr/>
           </a:p>
           <a:p>
             <a:pPr>
@@ -5305,7 +5455,7 @@
 </file>
 
 <file path=ppt/slides/slide5.xml><?xml version="1.0" encoding="utf-8"?>
-<p:sld xmlns:a="http://schemas.openxmlformats.org/drawingml/2006/main" xmlns:p="http://schemas.openxmlformats.org/presentationml/2006/main" xmlns:r="http://schemas.openxmlformats.org/officeDocument/2006/relationships">
+<p:sld xmlns:a="http://schemas.openxmlformats.org/drawingml/2006/main" xmlns:r="http://schemas.openxmlformats.org/officeDocument/2006/relationships" xmlns:p="http://schemas.openxmlformats.org/presentationml/2006/main">
   <p:cSld>
     <p:bg>
       <p:bgPr>
@@ -5321,7 +5471,14 @@
         <p:cNvGrpSpPr/>
         <p:nvPr/>
       </p:nvGrpSpPr>
-      <p:grpSpPr/>
+      <p:grpSpPr>
+        <a:xfrm>
+          <a:off x="0" y="0"/>
+          <a:ext cx="0" cy="0"/>
+          <a:chOff x="0" y="0"/>
+          <a:chExt cx="0" cy="0"/>
+        </a:xfrm>
+      </p:grpSpPr>
       <p:sp>
         <p:nvSpPr>
           <p:cNvPr id="2" name="TextBox 1"/>
@@ -5345,7 +5502,7 @@
           <a:lstStyle/>
           <a:p>
             <a:pPr>
-              <a:defRPr b="1" sz="3200">
+              <a:defRPr sz="3200" b="1">
                 <a:solidFill>
                   <a:srgbClr val="0A2540"/>
                 </a:solidFill>
@@ -5448,6 +5605,7 @@
                 <a:latin typeface="Segoe UI"/>
               </a:defRPr>
             </a:pPr>
+            <a:endParaRPr/>
           </a:p>
           <a:p>
             <a:pPr>
@@ -5517,7 +5675,7 @@
 </file>
 
 <file path=ppt/slides/slide6.xml><?xml version="1.0" encoding="utf-8"?>
-<p:sld xmlns:a="http://schemas.openxmlformats.org/drawingml/2006/main" xmlns:p="http://schemas.openxmlformats.org/presentationml/2006/main" xmlns:r="http://schemas.openxmlformats.org/officeDocument/2006/relationships">
+<p:sld xmlns:a="http://schemas.openxmlformats.org/drawingml/2006/main" xmlns:r="http://schemas.openxmlformats.org/officeDocument/2006/relationships" xmlns:p="http://schemas.openxmlformats.org/presentationml/2006/main">
   <p:cSld>
     <p:bg>
       <p:bgPr>
@@ -5533,7 +5691,14 @@
         <p:cNvGrpSpPr/>
         <p:nvPr/>
       </p:nvGrpSpPr>
-      <p:grpSpPr/>
+      <p:grpSpPr>
+        <a:xfrm>
+          <a:off x="0" y="0"/>
+          <a:ext cx="0" cy="0"/>
+          <a:chOff x="0" y="0"/>
+          <a:chExt cx="0" cy="0"/>
+        </a:xfrm>
+      </p:grpSpPr>
       <p:sp>
         <p:nvSpPr>
           <p:cNvPr id="2" name="TextBox 1"/>
@@ -5557,7 +5722,7 @@
           <a:lstStyle/>
           <a:p>
             <a:pPr>
-              <a:defRPr b="1" sz="3200">
+              <a:defRPr sz="3200" b="1">
                 <a:solidFill>
                   <a:srgbClr val="0A2540"/>
                 </a:solidFill>
@@ -5660,6 +5825,7 @@
                 <a:latin typeface="Segoe UI"/>
               </a:defRPr>
             </a:pPr>
+            <a:endParaRPr/>
           </a:p>
           <a:p>
             <a:pPr>
@@ -5729,7 +5895,7 @@
 </file>
 
 <file path=ppt/slides/slide7.xml><?xml version="1.0" encoding="utf-8"?>
-<p:sld xmlns:a="http://schemas.openxmlformats.org/drawingml/2006/main" xmlns:p="http://schemas.openxmlformats.org/presentationml/2006/main" xmlns:r="http://schemas.openxmlformats.org/officeDocument/2006/relationships">
+<p:sld xmlns:a="http://schemas.openxmlformats.org/drawingml/2006/main" xmlns:r="http://schemas.openxmlformats.org/officeDocument/2006/relationships" xmlns:p="http://schemas.openxmlformats.org/presentationml/2006/main">
   <p:cSld>
     <p:bg>
       <p:bgPr>
@@ -5745,7 +5911,14 @@
         <p:cNvGrpSpPr/>
         <p:nvPr/>
       </p:nvGrpSpPr>
-      <p:grpSpPr/>
+      <p:grpSpPr>
+        <a:xfrm>
+          <a:off x="0" y="0"/>
+          <a:ext cx="0" cy="0"/>
+          <a:chOff x="0" y="0"/>
+          <a:chExt cx="0" cy="0"/>
+        </a:xfrm>
+      </p:grpSpPr>
       <p:sp>
         <p:nvSpPr>
           <p:cNvPr id="2" name="TextBox 1"/>
@@ -5769,7 +5942,7 @@
           <a:lstStyle/>
           <a:p>
             <a:pPr>
-              <a:defRPr b="1" sz="3200">
+              <a:defRPr sz="3200" b="1">
                 <a:solidFill>
                   <a:srgbClr val="0A2540"/>
                 </a:solidFill>
@@ -5872,6 +6045,7 @@
                 <a:latin typeface="Segoe UI"/>
               </a:defRPr>
             </a:pPr>
+            <a:endParaRPr/>
           </a:p>
           <a:p>
             <a:pPr>
@@ -5922,7 +6096,7 @@
 </file>
 
 <file path=ppt/slides/slide8.xml><?xml version="1.0" encoding="utf-8"?>
-<p:sld xmlns:a="http://schemas.openxmlformats.org/drawingml/2006/main" xmlns:p="http://schemas.openxmlformats.org/presentationml/2006/main" xmlns:r="http://schemas.openxmlformats.org/officeDocument/2006/relationships">
+<p:sld xmlns:a="http://schemas.openxmlformats.org/drawingml/2006/main" xmlns:r="http://schemas.openxmlformats.org/officeDocument/2006/relationships" xmlns:p="http://schemas.openxmlformats.org/presentationml/2006/main">
   <p:cSld>
     <p:bg>
       <p:bgPr>
@@ -5938,7 +6112,14 @@
         <p:cNvGrpSpPr/>
         <p:nvPr/>
       </p:nvGrpSpPr>
-      <p:grpSpPr/>
+      <p:grpSpPr>
+        <a:xfrm>
+          <a:off x="0" y="0"/>
+          <a:ext cx="0" cy="0"/>
+          <a:chOff x="0" y="0"/>
+          <a:chExt cx="0" cy="0"/>
+        </a:xfrm>
+      </p:grpSpPr>
       <p:sp>
         <p:nvSpPr>
           <p:cNvPr id="2" name="TextBox 1"/>
@@ -5962,7 +6143,7 @@
           <a:lstStyle/>
           <a:p>
             <a:pPr>
-              <a:defRPr b="1" sz="3200">
+              <a:defRPr sz="3200" b="1">
                 <a:solidFill>
                   <a:srgbClr val="0A2540"/>
                 </a:solidFill>
@@ -6065,6 +6246,7 @@
                 <a:latin typeface="Segoe UI"/>
               </a:defRPr>
             </a:pPr>
+            <a:endParaRPr/>
           </a:p>
           <a:p>
             <a:pPr>
@@ -6134,7 +6316,7 @@
 </file>
 
 <file path=ppt/slides/slide9.xml><?xml version="1.0" encoding="utf-8"?>
-<p:sld xmlns:a="http://schemas.openxmlformats.org/drawingml/2006/main" xmlns:p="http://schemas.openxmlformats.org/presentationml/2006/main" xmlns:r="http://schemas.openxmlformats.org/officeDocument/2006/relationships">
+<p:sld xmlns:a="http://schemas.openxmlformats.org/drawingml/2006/main" xmlns:r="http://schemas.openxmlformats.org/officeDocument/2006/relationships" xmlns:p="http://schemas.openxmlformats.org/presentationml/2006/main">
   <p:cSld>
     <p:bg>
       <p:bgPr>
@@ -6150,7 +6332,14 @@
         <p:cNvGrpSpPr/>
         <p:nvPr/>
       </p:nvGrpSpPr>
-      <p:grpSpPr/>
+      <p:grpSpPr>
+        <a:xfrm>
+          <a:off x="0" y="0"/>
+          <a:ext cx="0" cy="0"/>
+          <a:chOff x="0" y="0"/>
+          <a:chExt cx="0" cy="0"/>
+        </a:xfrm>
+      </p:grpSpPr>
       <p:sp>
         <p:nvSpPr>
           <p:cNvPr id="2" name="TextBox 1"/>
@@ -6174,7 +6363,7 @@
           <a:lstStyle/>
           <a:p>
             <a:pPr>
-              <a:defRPr b="1" sz="3200">
+              <a:defRPr sz="3200" b="1">
                 <a:solidFill>
                   <a:srgbClr val="0A2540"/>
                 </a:solidFill>
@@ -6277,6 +6466,7 @@
                 <a:latin typeface="Segoe UI"/>
               </a:defRPr>
             </a:pPr>
+            <a:endParaRPr/>
           </a:p>
           <a:p>
             <a:pPr>

--- a/presentation/TwinSense_Presentation.pptx
+++ b/presentation/TwinSense_Presentation.pptx
@@ -5,25 +5,25 @@
     <p:sldMasterId id="2147483648" r:id="rId1"/>
   </p:sldMasterIdLst>
   <p:sldIdLst>
-    <p:sldId id="256" r:id="rId7"/>
-    <p:sldId id="257" r:id="rId8"/>
-    <p:sldId id="258" r:id="rId9"/>
-    <p:sldId id="259" r:id="rId10"/>
-    <p:sldId id="260" r:id="rId11"/>
-    <p:sldId id="261" r:id="rId12"/>
-    <p:sldId id="262" r:id="rId13"/>
-    <p:sldId id="263" r:id="rId14"/>
-    <p:sldId id="264" r:id="rId15"/>
-    <p:sldId id="265" r:id="rId16"/>
-    <p:sldId id="266" r:id="rId17"/>
-    <p:sldId id="267" r:id="rId18"/>
-    <p:sldId id="268" r:id="rId19"/>
-    <p:sldId id="269" r:id="rId20"/>
-    <p:sldId id="270" r:id="rId21"/>
-    <p:sldId id="271" r:id="rId22"/>
-    <p:sldId id="272" r:id="rId23"/>
+    <p:sldId id="256" r:id="rId2"/>
+    <p:sldId id="257" r:id="rId3"/>
+    <p:sldId id="258" r:id="rId4"/>
+    <p:sldId id="259" r:id="rId5"/>
+    <p:sldId id="260" r:id="rId6"/>
+    <p:sldId id="261" r:id="rId7"/>
+    <p:sldId id="262" r:id="rId8"/>
+    <p:sldId id="263" r:id="rId9"/>
+    <p:sldId id="264" r:id="rId10"/>
+    <p:sldId id="265" r:id="rId11"/>
+    <p:sldId id="266" r:id="rId12"/>
+    <p:sldId id="267" r:id="rId13"/>
+    <p:sldId id="268" r:id="rId14"/>
+    <p:sldId id="269" r:id="rId15"/>
+    <p:sldId id="270" r:id="rId16"/>
+    <p:sldId id="271" r:id="rId17"/>
+    <p:sldId id="272" r:id="rId18"/>
   </p:sldIdLst>
-  <p:sldSz cx="12191695" cy="6858000" type="screen4x3"/>
+  <p:sldSz cx="12192000" cy="6858000"/>
   <p:notesSz cx="6858000" cy="9144000"/>
   <p:defaultTextStyle>
     <a:defPPr>
@@ -120,6 +120,22 @@
       </a:defRPr>
     </a:lvl9pPr>
   </p:defaultTextStyle>
+  <p:extLst>
+    <p:ext uri="{EFAFB233-063F-42B5-8137-9DF3F51BA10A}">
+      <p15:sldGuideLst xmlns:p15="http://schemas.microsoft.com/office/powerpoint/2012/main">
+        <p15:guide id="1" orient="horz" pos="2160">
+          <p15:clr>
+            <a:srgbClr val="A4A3A4"/>
+          </p15:clr>
+        </p15:guide>
+        <p15:guide id="2" pos="2880">
+          <p15:clr>
+            <a:srgbClr val="A4A3A4"/>
+          </p15:clr>
+        </p15:guide>
+      </p15:sldGuideLst>
+    </p:ext>
+  </p:extLst>
 </p:presentation>
 </file>
 
@@ -161,10 +177,9 @@
           <a:lstStyle/>
           <a:p>
             <a:r>
-              <a:rPr lang="en-US" smtClean="0"/>
+              <a:rPr lang="en-US"/>
               <a:t>Click to edit Master title style</a:t>
             </a:r>
-            <a:endParaRPr lang="en-US"/>
           </a:p>
         </p:txBody>
       </p:sp>
@@ -280,10 +295,9 @@
           </a:lstStyle>
           <a:p>
             <a:r>
-              <a:rPr lang="en-US" smtClean="0"/>
+              <a:rPr lang="en-US"/>
               <a:t>Click to edit Master subtitle style</a:t>
             </a:r>
-            <a:endParaRPr lang="en-US"/>
           </a:p>
         </p:txBody>
       </p:sp>
@@ -304,7 +318,7 @@
           <a:p>
             <a:fld id="{5BCAD085-E8A6-8845-BD4E-CB4CCA059FC4}" type="datetimeFigureOut">
               <a:rPr lang="en-US" smtClean="0"/>
-              <a:t>1/27/13</a:t>
+              <a:t>6/20/2026</a:t>
             </a:fld>
             <a:endParaRPr lang="en-US"/>
           </a:p>
@@ -398,10 +412,9 @@
           <a:lstStyle/>
           <a:p>
             <a:r>
-              <a:rPr lang="en-US" smtClean="0"/>
+              <a:rPr lang="en-US"/>
               <a:t>Click to edit Master title style</a:t>
             </a:r>
-            <a:endParaRPr lang="en-US"/>
           </a:p>
         </p:txBody>
       </p:sp>
@@ -422,38 +435,37 @@
           <a:p>
             <a:pPr lvl="0"/>
             <a:r>
-              <a:rPr lang="en-US" smtClean="0"/>
+              <a:rPr lang="en-US"/>
               <a:t>Click to edit Master text styles</a:t>
             </a:r>
           </a:p>
           <a:p>
             <a:pPr lvl="1"/>
             <a:r>
-              <a:rPr lang="en-US" smtClean="0"/>
+              <a:rPr lang="en-US"/>
               <a:t>Second level</a:t>
             </a:r>
           </a:p>
           <a:p>
             <a:pPr lvl="2"/>
             <a:r>
-              <a:rPr lang="en-US" smtClean="0"/>
+              <a:rPr lang="en-US"/>
               <a:t>Third level</a:t>
             </a:r>
           </a:p>
           <a:p>
             <a:pPr lvl="3"/>
             <a:r>
-              <a:rPr lang="en-US" smtClean="0"/>
+              <a:rPr lang="en-US"/>
               <a:t>Fourth level</a:t>
             </a:r>
           </a:p>
           <a:p>
             <a:pPr lvl="4"/>
             <a:r>
-              <a:rPr lang="en-US" smtClean="0"/>
+              <a:rPr lang="en-US"/>
               <a:t>Fifth level</a:t>
             </a:r>
-            <a:endParaRPr lang="en-US"/>
           </a:p>
         </p:txBody>
       </p:sp>
@@ -474,7 +486,7 @@
           <a:p>
             <a:fld id="{5BCAD085-E8A6-8845-BD4E-CB4CCA059FC4}" type="datetimeFigureOut">
               <a:rPr lang="en-US" smtClean="0"/>
-              <a:t>1/27/13</a:t>
+              <a:t>6/20/2026</a:t>
             </a:fld>
             <a:endParaRPr lang="en-US"/>
           </a:p>
@@ -573,10 +585,9 @@
           <a:lstStyle/>
           <a:p>
             <a:r>
-              <a:rPr lang="en-US" smtClean="0"/>
+              <a:rPr lang="en-US"/>
               <a:t>Click to edit Master title style</a:t>
             </a:r>
-            <a:endParaRPr lang="en-US"/>
           </a:p>
         </p:txBody>
       </p:sp>
@@ -602,38 +613,37 @@
           <a:p>
             <a:pPr lvl="0"/>
             <a:r>
-              <a:rPr lang="en-US" smtClean="0"/>
+              <a:rPr lang="en-US"/>
               <a:t>Click to edit Master text styles</a:t>
             </a:r>
           </a:p>
           <a:p>
             <a:pPr lvl="1"/>
             <a:r>
-              <a:rPr lang="en-US" smtClean="0"/>
+              <a:rPr lang="en-US"/>
               <a:t>Second level</a:t>
             </a:r>
           </a:p>
           <a:p>
             <a:pPr lvl="2"/>
             <a:r>
-              <a:rPr lang="en-US" smtClean="0"/>
+              <a:rPr lang="en-US"/>
               <a:t>Third level</a:t>
             </a:r>
           </a:p>
           <a:p>
             <a:pPr lvl="3"/>
             <a:r>
-              <a:rPr lang="en-US" smtClean="0"/>
+              <a:rPr lang="en-US"/>
               <a:t>Fourth level</a:t>
             </a:r>
           </a:p>
           <a:p>
             <a:pPr lvl="4"/>
             <a:r>
-              <a:rPr lang="en-US" smtClean="0"/>
+              <a:rPr lang="en-US"/>
               <a:t>Fifth level</a:t>
             </a:r>
-            <a:endParaRPr lang="en-US"/>
           </a:p>
         </p:txBody>
       </p:sp>
@@ -654,7 +664,7 @@
           <a:p>
             <a:fld id="{5BCAD085-E8A6-8845-BD4E-CB4CCA059FC4}" type="datetimeFigureOut">
               <a:rPr lang="en-US" smtClean="0"/>
-              <a:t>1/27/13</a:t>
+              <a:t>6/20/2026</a:t>
             </a:fld>
             <a:endParaRPr lang="en-US"/>
           </a:p>
@@ -748,10 +758,9 @@
           <a:lstStyle/>
           <a:p>
             <a:r>
-              <a:rPr lang="en-US" smtClean="0"/>
+              <a:rPr lang="en-US"/>
               <a:t>Click to edit Master title style</a:t>
             </a:r>
-            <a:endParaRPr lang="en-US"/>
           </a:p>
         </p:txBody>
       </p:sp>
@@ -772,38 +781,37 @@
           <a:p>
             <a:pPr lvl="0"/>
             <a:r>
-              <a:rPr lang="en-US" smtClean="0"/>
+              <a:rPr lang="en-US"/>
               <a:t>Click to edit Master text styles</a:t>
             </a:r>
           </a:p>
           <a:p>
             <a:pPr lvl="1"/>
             <a:r>
-              <a:rPr lang="en-US" smtClean="0"/>
+              <a:rPr lang="en-US"/>
               <a:t>Second level</a:t>
             </a:r>
           </a:p>
           <a:p>
             <a:pPr lvl="2"/>
             <a:r>
-              <a:rPr lang="en-US" smtClean="0"/>
+              <a:rPr lang="en-US"/>
               <a:t>Third level</a:t>
             </a:r>
           </a:p>
           <a:p>
             <a:pPr lvl="3"/>
             <a:r>
-              <a:rPr lang="en-US" smtClean="0"/>
+              <a:rPr lang="en-US"/>
               <a:t>Fourth level</a:t>
             </a:r>
           </a:p>
           <a:p>
             <a:pPr lvl="4"/>
             <a:r>
-              <a:rPr lang="en-US" smtClean="0"/>
+              <a:rPr lang="en-US"/>
               <a:t>Fifth level</a:t>
             </a:r>
-            <a:endParaRPr lang="en-US"/>
           </a:p>
         </p:txBody>
       </p:sp>
@@ -824,7 +832,7 @@
           <a:p>
             <a:fld id="{5BCAD085-E8A6-8845-BD4E-CB4CCA059FC4}" type="datetimeFigureOut">
               <a:rPr lang="en-US" smtClean="0"/>
-              <a:t>1/27/13</a:t>
+              <a:t>6/20/2026</a:t>
             </a:fld>
             <a:endParaRPr lang="en-US"/>
           </a:p>
@@ -927,10 +935,9 @@
           </a:lstStyle>
           <a:p>
             <a:r>
-              <a:rPr lang="en-US" smtClean="0"/>
+              <a:rPr lang="en-US"/>
               <a:t>Click to edit Master title style</a:t>
             </a:r>
-            <a:endParaRPr lang="en-US"/>
           </a:p>
         </p:txBody>
       </p:sp>
@@ -1047,7 +1054,7 @@
           <a:p>
             <a:pPr lvl="0"/>
             <a:r>
-              <a:rPr lang="en-US" smtClean="0"/>
+              <a:rPr lang="en-US"/>
               <a:t>Click to edit Master text styles</a:t>
             </a:r>
           </a:p>
@@ -1070,7 +1077,7 @@
           <a:p>
             <a:fld id="{5BCAD085-E8A6-8845-BD4E-CB4CCA059FC4}" type="datetimeFigureOut">
               <a:rPr lang="en-US" smtClean="0"/>
-              <a:t>1/27/13</a:t>
+              <a:t>6/20/2026</a:t>
             </a:fld>
             <a:endParaRPr lang="en-US"/>
           </a:p>
@@ -1164,10 +1171,9 @@
           <a:lstStyle/>
           <a:p>
             <a:r>
-              <a:rPr lang="en-US" smtClean="0"/>
+              <a:rPr lang="en-US"/>
               <a:t>Click to edit Master title style</a:t>
             </a:r>
-            <a:endParaRPr lang="en-US"/>
           </a:p>
         </p:txBody>
       </p:sp>
@@ -1221,38 +1227,37 @@
           <a:p>
             <a:pPr lvl="0"/>
             <a:r>
-              <a:rPr lang="en-US" smtClean="0"/>
+              <a:rPr lang="en-US"/>
               <a:t>Click to edit Master text styles</a:t>
             </a:r>
           </a:p>
           <a:p>
             <a:pPr lvl="1"/>
             <a:r>
-              <a:rPr lang="en-US" smtClean="0"/>
+              <a:rPr lang="en-US"/>
               <a:t>Second level</a:t>
             </a:r>
           </a:p>
           <a:p>
             <a:pPr lvl="2"/>
             <a:r>
-              <a:rPr lang="en-US" smtClean="0"/>
+              <a:rPr lang="en-US"/>
               <a:t>Third level</a:t>
             </a:r>
           </a:p>
           <a:p>
             <a:pPr lvl="3"/>
             <a:r>
-              <a:rPr lang="en-US" smtClean="0"/>
+              <a:rPr lang="en-US"/>
               <a:t>Fourth level</a:t>
             </a:r>
           </a:p>
           <a:p>
             <a:pPr lvl="4"/>
             <a:r>
-              <a:rPr lang="en-US" smtClean="0"/>
+              <a:rPr lang="en-US"/>
               <a:t>Fifth level</a:t>
             </a:r>
-            <a:endParaRPr lang="en-US"/>
           </a:p>
         </p:txBody>
       </p:sp>
@@ -1306,38 +1311,37 @@
           <a:p>
             <a:pPr lvl="0"/>
             <a:r>
-              <a:rPr lang="en-US" smtClean="0"/>
+              <a:rPr lang="en-US"/>
               <a:t>Click to edit Master text styles</a:t>
             </a:r>
           </a:p>
           <a:p>
             <a:pPr lvl="1"/>
             <a:r>
-              <a:rPr lang="en-US" smtClean="0"/>
+              <a:rPr lang="en-US"/>
               <a:t>Second level</a:t>
             </a:r>
           </a:p>
           <a:p>
             <a:pPr lvl="2"/>
             <a:r>
-              <a:rPr lang="en-US" smtClean="0"/>
+              <a:rPr lang="en-US"/>
               <a:t>Third level</a:t>
             </a:r>
           </a:p>
           <a:p>
             <a:pPr lvl="3"/>
             <a:r>
-              <a:rPr lang="en-US" smtClean="0"/>
+              <a:rPr lang="en-US"/>
               <a:t>Fourth level</a:t>
             </a:r>
           </a:p>
           <a:p>
             <a:pPr lvl="4"/>
             <a:r>
-              <a:rPr lang="en-US" smtClean="0"/>
+              <a:rPr lang="en-US"/>
               <a:t>Fifth level</a:t>
             </a:r>
-            <a:endParaRPr lang="en-US"/>
           </a:p>
         </p:txBody>
       </p:sp>
@@ -1358,7 +1362,7 @@
           <a:p>
             <a:fld id="{5BCAD085-E8A6-8845-BD4E-CB4CCA059FC4}" type="datetimeFigureOut">
               <a:rPr lang="en-US" smtClean="0"/>
-              <a:t>1/27/13</a:t>
+              <a:t>6/20/2026</a:t>
             </a:fld>
             <a:endParaRPr lang="en-US"/>
           </a:p>
@@ -1456,10 +1460,9 @@
           </a:lstStyle>
           <a:p>
             <a:r>
-              <a:rPr lang="en-US" smtClean="0"/>
+              <a:rPr lang="en-US"/>
               <a:t>Click to edit Master title style</a:t>
             </a:r>
-            <a:endParaRPr lang="en-US"/>
           </a:p>
         </p:txBody>
       </p:sp>
@@ -1522,7 +1525,7 @@
           <a:p>
             <a:pPr lvl="0"/>
             <a:r>
-              <a:rPr lang="en-US" smtClean="0"/>
+              <a:rPr lang="en-US"/>
               <a:t>Click to edit Master text styles</a:t>
             </a:r>
           </a:p>
@@ -1578,38 +1581,37 @@
           <a:p>
             <a:pPr lvl="0"/>
             <a:r>
-              <a:rPr lang="en-US" smtClean="0"/>
+              <a:rPr lang="en-US"/>
               <a:t>Click to edit Master text styles</a:t>
             </a:r>
           </a:p>
           <a:p>
             <a:pPr lvl="1"/>
             <a:r>
-              <a:rPr lang="en-US" smtClean="0"/>
+              <a:rPr lang="en-US"/>
               <a:t>Second level</a:t>
             </a:r>
           </a:p>
           <a:p>
             <a:pPr lvl="2"/>
             <a:r>
-              <a:rPr lang="en-US" smtClean="0"/>
+              <a:rPr lang="en-US"/>
               <a:t>Third level</a:t>
             </a:r>
           </a:p>
           <a:p>
             <a:pPr lvl="3"/>
             <a:r>
-              <a:rPr lang="en-US" smtClean="0"/>
+              <a:rPr lang="en-US"/>
               <a:t>Fourth level</a:t>
             </a:r>
           </a:p>
           <a:p>
             <a:pPr lvl="4"/>
             <a:r>
-              <a:rPr lang="en-US" smtClean="0"/>
+              <a:rPr lang="en-US"/>
               <a:t>Fifth level</a:t>
             </a:r>
-            <a:endParaRPr lang="en-US"/>
           </a:p>
         </p:txBody>
       </p:sp>
@@ -1672,7 +1674,7 @@
           <a:p>
             <a:pPr lvl="0"/>
             <a:r>
-              <a:rPr lang="en-US" smtClean="0"/>
+              <a:rPr lang="en-US"/>
               <a:t>Click to edit Master text styles</a:t>
             </a:r>
           </a:p>
@@ -1728,38 +1730,37 @@
           <a:p>
             <a:pPr lvl="0"/>
             <a:r>
-              <a:rPr lang="en-US" smtClean="0"/>
+              <a:rPr lang="en-US"/>
               <a:t>Click to edit Master text styles</a:t>
             </a:r>
           </a:p>
           <a:p>
             <a:pPr lvl="1"/>
             <a:r>
-              <a:rPr lang="en-US" smtClean="0"/>
+              <a:rPr lang="en-US"/>
               <a:t>Second level</a:t>
             </a:r>
           </a:p>
           <a:p>
             <a:pPr lvl="2"/>
             <a:r>
-              <a:rPr lang="en-US" smtClean="0"/>
+              <a:rPr lang="en-US"/>
               <a:t>Third level</a:t>
             </a:r>
           </a:p>
           <a:p>
             <a:pPr lvl="3"/>
             <a:r>
-              <a:rPr lang="en-US" smtClean="0"/>
+              <a:rPr lang="en-US"/>
               <a:t>Fourth level</a:t>
             </a:r>
           </a:p>
           <a:p>
             <a:pPr lvl="4"/>
             <a:r>
-              <a:rPr lang="en-US" smtClean="0"/>
+              <a:rPr lang="en-US"/>
               <a:t>Fifth level</a:t>
             </a:r>
-            <a:endParaRPr lang="en-US"/>
           </a:p>
         </p:txBody>
       </p:sp>
@@ -1780,7 +1781,7 @@
           <a:p>
             <a:fld id="{5BCAD085-E8A6-8845-BD4E-CB4CCA059FC4}" type="datetimeFigureOut">
               <a:rPr lang="en-US" smtClean="0"/>
-              <a:t>1/27/13</a:t>
+              <a:t>6/20/2026</a:t>
             </a:fld>
             <a:endParaRPr lang="en-US"/>
           </a:p>
@@ -1874,10 +1875,9 @@
           <a:lstStyle/>
           <a:p>
             <a:r>
-              <a:rPr lang="en-US" smtClean="0"/>
+              <a:rPr lang="en-US"/>
               <a:t>Click to edit Master title style</a:t>
             </a:r>
-            <a:endParaRPr lang="en-US"/>
           </a:p>
         </p:txBody>
       </p:sp>
@@ -1898,7 +1898,7 @@
           <a:p>
             <a:fld id="{5BCAD085-E8A6-8845-BD4E-CB4CCA059FC4}" type="datetimeFigureOut">
               <a:rPr lang="en-US" smtClean="0"/>
-              <a:t>1/27/13</a:t>
+              <a:t>6/20/2026</a:t>
             </a:fld>
             <a:endParaRPr lang="en-US"/>
           </a:p>
@@ -1993,7 +1993,7 @@
           <a:p>
             <a:fld id="{5BCAD085-E8A6-8845-BD4E-CB4CCA059FC4}" type="datetimeFigureOut">
               <a:rPr lang="en-US" smtClean="0"/>
-              <a:t>1/27/13</a:t>
+              <a:t>6/20/2026</a:t>
             </a:fld>
             <a:endParaRPr lang="en-US"/>
           </a:p>
@@ -2096,10 +2096,9 @@
           </a:lstStyle>
           <a:p>
             <a:r>
-              <a:rPr lang="en-US" smtClean="0"/>
+              <a:rPr lang="en-US"/>
               <a:t>Click to edit Master title style</a:t>
             </a:r>
-            <a:endParaRPr lang="en-US"/>
           </a:p>
         </p:txBody>
       </p:sp>
@@ -2153,38 +2152,37 @@
           <a:p>
             <a:pPr lvl="0"/>
             <a:r>
-              <a:rPr lang="en-US" smtClean="0"/>
+              <a:rPr lang="en-US"/>
               <a:t>Click to edit Master text styles</a:t>
             </a:r>
           </a:p>
           <a:p>
             <a:pPr lvl="1"/>
             <a:r>
-              <a:rPr lang="en-US" smtClean="0"/>
+              <a:rPr lang="en-US"/>
               <a:t>Second level</a:t>
             </a:r>
           </a:p>
           <a:p>
             <a:pPr lvl="2"/>
             <a:r>
-              <a:rPr lang="en-US" smtClean="0"/>
+              <a:rPr lang="en-US"/>
               <a:t>Third level</a:t>
             </a:r>
           </a:p>
           <a:p>
             <a:pPr lvl="3"/>
             <a:r>
-              <a:rPr lang="en-US" smtClean="0"/>
+              <a:rPr lang="en-US"/>
               <a:t>Fourth level</a:t>
             </a:r>
           </a:p>
           <a:p>
             <a:pPr lvl="4"/>
             <a:r>
-              <a:rPr lang="en-US" smtClean="0"/>
+              <a:rPr lang="en-US"/>
               <a:t>Fifth level</a:t>
             </a:r>
-            <a:endParaRPr lang="en-US"/>
           </a:p>
         </p:txBody>
       </p:sp>
@@ -2247,7 +2245,7 @@
           <a:p>
             <a:pPr lvl="0"/>
             <a:r>
-              <a:rPr lang="en-US" smtClean="0"/>
+              <a:rPr lang="en-US"/>
               <a:t>Click to edit Master text styles</a:t>
             </a:r>
           </a:p>
@@ -2270,7 +2268,7 @@
           <a:p>
             <a:fld id="{5BCAD085-E8A6-8845-BD4E-CB4CCA059FC4}" type="datetimeFigureOut">
               <a:rPr lang="en-US" smtClean="0"/>
-              <a:t>1/27/13</a:t>
+              <a:t>6/20/2026</a:t>
             </a:fld>
             <a:endParaRPr lang="en-US"/>
           </a:p>
@@ -2373,10 +2371,9 @@
           </a:lstStyle>
           <a:p>
             <a:r>
-              <a:rPr lang="en-US" smtClean="0"/>
+              <a:rPr lang="en-US"/>
               <a:t>Click to edit Master title style</a:t>
             </a:r>
-            <a:endParaRPr lang="en-US"/>
           </a:p>
         </p:txBody>
       </p:sp>
@@ -2500,7 +2497,7 @@
           <a:p>
             <a:pPr lvl="0"/>
             <a:r>
-              <a:rPr lang="en-US" smtClean="0"/>
+              <a:rPr lang="en-US"/>
               <a:t>Click to edit Master text styles</a:t>
             </a:r>
           </a:p>
@@ -2523,7 +2520,7 @@
           <a:p>
             <a:fld id="{5BCAD085-E8A6-8845-BD4E-CB4CCA059FC4}" type="datetimeFigureOut">
               <a:rPr lang="en-US" smtClean="0"/>
-              <a:t>1/27/13</a:t>
+              <a:t>6/20/2026</a:t>
             </a:fld>
             <a:endParaRPr lang="en-US"/>
           </a:p>
@@ -2632,10 +2629,9 @@
           <a:lstStyle/>
           <a:p>
             <a:r>
-              <a:rPr lang="en-US" smtClean="0"/>
+              <a:rPr lang="en-US"/>
               <a:t>Click to edit Master title style</a:t>
             </a:r>
-            <a:endParaRPr lang="en-US"/>
           </a:p>
         </p:txBody>
       </p:sp>
@@ -2666,38 +2662,37 @@
           <a:p>
             <a:pPr lvl="0"/>
             <a:r>
-              <a:rPr lang="en-US" smtClean="0"/>
+              <a:rPr lang="en-US"/>
               <a:t>Click to edit Master text styles</a:t>
             </a:r>
           </a:p>
           <a:p>
             <a:pPr lvl="1"/>
             <a:r>
-              <a:rPr lang="en-US" smtClean="0"/>
+              <a:rPr lang="en-US"/>
               <a:t>Second level</a:t>
             </a:r>
           </a:p>
           <a:p>
             <a:pPr lvl="2"/>
             <a:r>
-              <a:rPr lang="en-US" smtClean="0"/>
+              <a:rPr lang="en-US"/>
               <a:t>Third level</a:t>
             </a:r>
           </a:p>
           <a:p>
             <a:pPr lvl="3"/>
             <a:r>
-              <a:rPr lang="en-US" smtClean="0"/>
+              <a:rPr lang="en-US"/>
               <a:t>Fourth level</a:t>
             </a:r>
           </a:p>
           <a:p>
             <a:pPr lvl="4"/>
             <a:r>
-              <a:rPr lang="en-US" smtClean="0"/>
+              <a:rPr lang="en-US"/>
               <a:t>Fifth level</a:t>
             </a:r>
-            <a:endParaRPr lang="en-US"/>
           </a:p>
         </p:txBody>
       </p:sp>
@@ -2736,7 +2731,7 @@
           <a:p>
             <a:fld id="{5BCAD085-E8A6-8845-BD4E-CB4CCA059FC4}" type="datetimeFigureOut">
               <a:rPr lang="en-US" smtClean="0"/>
-              <a:t>1/27/13</a:t>
+              <a:t>6/20/2026</a:t>
             </a:fld>
             <a:endParaRPr lang="en-US"/>
           </a:p>
@@ -3095,7 +3090,7 @@
 </file>
 
 <file path=ppt/slides/slide1.xml><?xml version="1.0" encoding="utf-8"?>
-<p:sld xmlns:a="http://schemas.openxmlformats.org/drawingml/2006/main" xmlns:p="http://schemas.openxmlformats.org/presentationml/2006/main" xmlns:r="http://schemas.openxmlformats.org/officeDocument/2006/relationships">
+<p:sld xmlns:a="http://schemas.openxmlformats.org/drawingml/2006/main" xmlns:r="http://schemas.openxmlformats.org/officeDocument/2006/relationships" xmlns:p="http://schemas.openxmlformats.org/presentationml/2006/main">
   <p:cSld>
     <p:bg>
       <p:bgPr>
@@ -3111,7 +3106,14 @@
         <p:cNvGrpSpPr/>
         <p:nvPr/>
       </p:nvGrpSpPr>
-      <p:grpSpPr/>
+      <p:grpSpPr>
+        <a:xfrm>
+          <a:off x="0" y="0"/>
+          <a:ext cx="0" cy="0"/>
+          <a:chOff x="0" y="0"/>
+          <a:chExt cx="0" cy="0"/>
+        </a:xfrm>
+      </p:grpSpPr>
       <p:sp>
         <p:nvSpPr>
           <p:cNvPr id="2" name="TextBox 1"/>
@@ -3135,7 +3137,7 @@
           <a:lstStyle/>
           <a:p>
             <a:pPr algn="ctr">
-              <a:defRPr b="1" sz="6400">
+              <a:defRPr sz="6400" b="1">
                 <a:solidFill>
                   <a:srgbClr val="0055FF"/>
                 </a:solidFill>
@@ -3171,7 +3173,7 @@
           <a:lstStyle/>
           <a:p>
             <a:pPr algn="ctr">
-              <a:defRPr b="1" sz="2000">
+              <a:defRPr sz="2000" b="1">
                 <a:solidFill>
                   <a:srgbClr val="0A2540"/>
                 </a:solidFill>
@@ -3192,8 +3194,8 @@
         </p:nvSpPr>
         <p:spPr>
           <a:xfrm>
-            <a:off x="457200" y="5029200"/>
-            <a:ext cx="11277295" cy="914400"/>
+            <a:off x="2353060" y="5029200"/>
+            <a:ext cx="7485575" cy="523220"/>
           </a:xfrm>
           <a:prstGeom prst="rect">
             <a:avLst/>
@@ -3215,11 +3217,75 @@
               </a:defRPr>
             </a:pPr>
             <a:r>
-              <a:t>Nizar Baloubali • Manal Es-sobhy • Anas El Maslouti • Nouamane Chaibi • Amine Ait Hamma</a:t>
-            </a:r>
-            <a:br/>
-            <a:r>
-              <a:t>Encadré par : Mr. El Hajji</a:t>
+              <a:rPr dirty="0"/>
+              <a:t>Nizar </a:t>
+            </a:r>
+            <a:r>
+              <a:rPr dirty="0" err="1"/>
+              <a:t>Baloubali</a:t>
+            </a:r>
+            <a:r>
+              <a:rPr dirty="0"/>
+              <a:t> • Manal Es-</a:t>
+            </a:r>
+            <a:r>
+              <a:rPr dirty="0" err="1"/>
+              <a:t>sobhy</a:t>
+            </a:r>
+            <a:r>
+              <a:rPr dirty="0"/>
+              <a:t> • Anas El </a:t>
+            </a:r>
+            <a:r>
+              <a:rPr dirty="0" err="1"/>
+              <a:t>Maslouti</a:t>
+            </a:r>
+            <a:r>
+              <a:rPr dirty="0"/>
+              <a:t> • </a:t>
+            </a:r>
+            <a:r>
+              <a:rPr dirty="0" err="1"/>
+              <a:t>Nouaman</a:t>
+            </a:r>
+            <a:r>
+              <a:rPr dirty="0"/>
+              <a:t> Ch</a:t>
+            </a:r>
+            <a:r>
+              <a:rPr lang="fr-FR" dirty="0"/>
+              <a:t>a</a:t>
+            </a:r>
+            <a:r>
+              <a:rPr dirty="0" err="1"/>
+              <a:t>aibi</a:t>
+            </a:r>
+            <a:r>
+              <a:rPr dirty="0"/>
+              <a:t> • Amine </a:t>
+            </a:r>
+            <a:r>
+              <a:rPr dirty="0" err="1"/>
+              <a:t>Ait</a:t>
+            </a:r>
+            <a:r>
+              <a:rPr dirty="0"/>
+              <a:t> </a:t>
+            </a:r>
+            <a:r>
+              <a:rPr dirty="0" err="1"/>
+              <a:t>Hamma</a:t>
+            </a:r>
+            <a:br>
+              <a:rPr dirty="0"/>
+            </a:br>
+            <a:r>
+              <a:rPr dirty="0" err="1"/>
+              <a:t>Encadré</a:t>
+            </a:r>
+            <a:r>
+              <a:rPr dirty="0"/>
+              <a:t> par : Mr. El Hajji</a:t>
             </a:r>
           </a:p>
         </p:txBody>
@@ -3233,7 +3299,7 @@
 </file>
 
 <file path=ppt/slides/slide10.xml><?xml version="1.0" encoding="utf-8"?>
-<p:sld xmlns:a="http://schemas.openxmlformats.org/drawingml/2006/main" xmlns:p="http://schemas.openxmlformats.org/presentationml/2006/main" xmlns:r="http://schemas.openxmlformats.org/officeDocument/2006/relationships">
+<p:sld xmlns:a="http://schemas.openxmlformats.org/drawingml/2006/main" xmlns:r="http://schemas.openxmlformats.org/officeDocument/2006/relationships" xmlns:p="http://schemas.openxmlformats.org/presentationml/2006/main">
   <p:cSld>
     <p:bg>
       <p:bgPr>
@@ -3249,7 +3315,14 @@
         <p:cNvGrpSpPr/>
         <p:nvPr/>
       </p:nvGrpSpPr>
-      <p:grpSpPr/>
+      <p:grpSpPr>
+        <a:xfrm>
+          <a:off x="0" y="0"/>
+          <a:ext cx="0" cy="0"/>
+          <a:chOff x="0" y="0"/>
+          <a:chExt cx="0" cy="0"/>
+        </a:xfrm>
+      </p:grpSpPr>
       <p:sp>
         <p:nvSpPr>
           <p:cNvPr id="2" name="TextBox 1"/>
@@ -3273,7 +3346,7 @@
           <a:lstStyle/>
           <a:p>
             <a:pPr>
-              <a:defRPr b="1" sz="2800">
+              <a:defRPr sz="2800" b="1">
                 <a:solidFill>
                   <a:srgbClr val="0A2540"/>
                 </a:solidFill>
@@ -3329,7 +3402,7 @@
         </p:nvSpPr>
         <p:spPr>
           <a:xfrm>
-            <a:off x="731520" y="1005840"/>
+            <a:off x="731520" y="1532823"/>
             <a:ext cx="10728655" cy="457200"/>
           </a:xfrm>
           <a:prstGeom prst="rect">
@@ -3352,7 +3425,24 @@
               </a:defRPr>
             </a:pPr>
             <a:r>
-              <a:t>Flux d'ingestion Kafka, Feature Store et orchestration des Modèles.</a:t>
+              <a:rPr dirty="0"/>
+              <a:t>Flux </a:t>
+            </a:r>
+            <a:r>
+              <a:rPr dirty="0" err="1"/>
+              <a:t>d'ingestion</a:t>
+            </a:r>
+            <a:r>
+              <a:rPr dirty="0"/>
+              <a:t> Kafka, Feature Store et orchestration des </a:t>
+            </a:r>
+            <a:r>
+              <a:rPr dirty="0" err="1"/>
+              <a:t>Modèles</a:t>
+            </a:r>
+            <a:r>
+              <a:rPr dirty="0"/>
+              <a:t>.</a:t>
             </a:r>
           </a:p>
         </p:txBody>
@@ -3373,7 +3463,7 @@
         </p:blipFill>
         <p:spPr>
           <a:xfrm>
-            <a:off x="2666847" y="1645920"/>
+            <a:off x="2666847" y="2151247"/>
             <a:ext cx="6858000" cy="2212975"/>
           </a:xfrm>
           <a:prstGeom prst="rect">
@@ -3390,7 +3480,7 @@
 </file>
 
 <file path=ppt/slides/slide11.xml><?xml version="1.0" encoding="utf-8"?>
-<p:sld xmlns:a="http://schemas.openxmlformats.org/drawingml/2006/main" xmlns:p="http://schemas.openxmlformats.org/presentationml/2006/main" xmlns:r="http://schemas.openxmlformats.org/officeDocument/2006/relationships">
+<p:sld xmlns:a="http://schemas.openxmlformats.org/drawingml/2006/main" xmlns:r="http://schemas.openxmlformats.org/officeDocument/2006/relationships" xmlns:p="http://schemas.openxmlformats.org/presentationml/2006/main">
   <p:cSld>
     <p:bg>
       <p:bgPr>
@@ -3406,7 +3496,14 @@
         <p:cNvGrpSpPr/>
         <p:nvPr/>
       </p:nvGrpSpPr>
-      <p:grpSpPr/>
+      <p:grpSpPr>
+        <a:xfrm>
+          <a:off x="0" y="0"/>
+          <a:ext cx="0" cy="0"/>
+          <a:chOff x="0" y="0"/>
+          <a:chExt cx="0" cy="0"/>
+        </a:xfrm>
+      </p:grpSpPr>
       <p:sp>
         <p:nvSpPr>
           <p:cNvPr id="2" name="TextBox 1"/>
@@ -3430,7 +3527,7 @@
           <a:lstStyle/>
           <a:p>
             <a:pPr>
-              <a:defRPr b="1" sz="2800">
+              <a:defRPr sz="2800" b="1">
                 <a:solidFill>
                   <a:srgbClr val="0A2540"/>
                 </a:solidFill>
@@ -3486,7 +3583,7 @@
         </p:nvSpPr>
         <p:spPr>
           <a:xfrm>
-            <a:off x="731520" y="1005840"/>
+            <a:off x="731520" y="1366787"/>
             <a:ext cx="10728655" cy="457200"/>
           </a:xfrm>
           <a:prstGeom prst="rect">
@@ -3509,7 +3606,16 @@
               </a:defRPr>
             </a:pPr>
             <a:r>
-              <a:t>Supervision Géospatiale Interactive au Kennedy Space Center.</a:t>
+              <a:rPr dirty="0"/>
+              <a:t>Supervision </a:t>
+            </a:r>
+            <a:r>
+              <a:rPr dirty="0" err="1"/>
+              <a:t>Géospatiale</a:t>
+            </a:r>
+            <a:r>
+              <a:rPr dirty="0"/>
+              <a:t> Interactive au Kennedy Space Center.</a:t>
             </a:r>
           </a:p>
         </p:txBody>
@@ -3530,7 +3636,7 @@
         </p:blipFill>
         <p:spPr>
           <a:xfrm>
-            <a:off x="2438247" y="1645920"/>
+            <a:off x="2438247" y="1828800"/>
             <a:ext cx="7315200" cy="4572000"/>
           </a:xfrm>
           <a:prstGeom prst="rect">
@@ -3547,7 +3653,7 @@
 </file>
 
 <file path=ppt/slides/slide12.xml><?xml version="1.0" encoding="utf-8"?>
-<p:sld xmlns:a="http://schemas.openxmlformats.org/drawingml/2006/main" xmlns:p="http://schemas.openxmlformats.org/presentationml/2006/main" xmlns:r="http://schemas.openxmlformats.org/officeDocument/2006/relationships">
+<p:sld xmlns:a="http://schemas.openxmlformats.org/drawingml/2006/main" xmlns:r="http://schemas.openxmlformats.org/officeDocument/2006/relationships" xmlns:p="http://schemas.openxmlformats.org/presentationml/2006/main">
   <p:cSld>
     <p:bg>
       <p:bgPr>
@@ -3563,7 +3669,14 @@
         <p:cNvGrpSpPr/>
         <p:nvPr/>
       </p:nvGrpSpPr>
-      <p:grpSpPr/>
+      <p:grpSpPr>
+        <a:xfrm>
+          <a:off x="0" y="0"/>
+          <a:ext cx="0" cy="0"/>
+          <a:chOff x="0" y="0"/>
+          <a:chExt cx="0" cy="0"/>
+        </a:xfrm>
+      </p:grpSpPr>
       <p:sp>
         <p:nvSpPr>
           <p:cNvPr id="2" name="TextBox 1"/>
@@ -3587,7 +3700,7 @@
           <a:lstStyle/>
           <a:p>
             <a:pPr>
-              <a:defRPr b="1" sz="2800">
+              <a:defRPr sz="2800" b="1">
                 <a:solidFill>
                   <a:srgbClr val="0A2540"/>
                 </a:solidFill>
@@ -3643,7 +3756,7 @@
         </p:nvSpPr>
         <p:spPr>
           <a:xfrm>
-            <a:off x="731520" y="1005840"/>
+            <a:off x="815741" y="1422133"/>
             <a:ext cx="10728655" cy="457200"/>
           </a:xfrm>
           <a:prstGeom prst="rect">
@@ -3666,7 +3779,28 @@
               </a:defRPr>
             </a:pPr>
             <a:r>
-              <a:t>Registre dynamique des moteurs turbofans (ENG_001, ENG_002...).</a:t>
+              <a:rPr dirty="0" err="1"/>
+              <a:t>Registre</a:t>
+            </a:r>
+            <a:r>
+              <a:rPr dirty="0"/>
+              <a:t> </a:t>
+            </a:r>
+            <a:r>
+              <a:rPr dirty="0" err="1"/>
+              <a:t>dynamique</a:t>
+            </a:r>
+            <a:r>
+              <a:rPr dirty="0"/>
+              <a:t> des </a:t>
+            </a:r>
+            <a:r>
+              <a:rPr dirty="0" err="1"/>
+              <a:t>moteurs</a:t>
+            </a:r>
+            <a:r>
+              <a:rPr dirty="0"/>
+              <a:t> turbofans (ENG_001, ENG_002...).</a:t>
             </a:r>
           </a:p>
         </p:txBody>
@@ -3687,7 +3821,7 @@
         </p:blipFill>
         <p:spPr>
           <a:xfrm>
-            <a:off x="2438247" y="1645920"/>
+            <a:off x="2438247" y="1920240"/>
             <a:ext cx="7315200" cy="4572000"/>
           </a:xfrm>
           <a:prstGeom prst="rect">
@@ -3704,7 +3838,7 @@
 </file>
 
 <file path=ppt/slides/slide13.xml><?xml version="1.0" encoding="utf-8"?>
-<p:sld xmlns:a="http://schemas.openxmlformats.org/drawingml/2006/main" xmlns:p="http://schemas.openxmlformats.org/presentationml/2006/main" xmlns:r="http://schemas.openxmlformats.org/officeDocument/2006/relationships">
+<p:sld xmlns:a="http://schemas.openxmlformats.org/drawingml/2006/main" xmlns:r="http://schemas.openxmlformats.org/officeDocument/2006/relationships" xmlns:p="http://schemas.openxmlformats.org/presentationml/2006/main">
   <p:cSld>
     <p:bg>
       <p:bgPr>
@@ -3720,7 +3854,14 @@
         <p:cNvGrpSpPr/>
         <p:nvPr/>
       </p:nvGrpSpPr>
-      <p:grpSpPr/>
+      <p:grpSpPr>
+        <a:xfrm>
+          <a:off x="0" y="0"/>
+          <a:ext cx="0" cy="0"/>
+          <a:chOff x="0" y="0"/>
+          <a:chExt cx="0" cy="0"/>
+        </a:xfrm>
+      </p:grpSpPr>
       <p:sp>
         <p:nvSpPr>
           <p:cNvPr id="2" name="TextBox 1"/>
@@ -3744,7 +3885,7 @@
           <a:lstStyle/>
           <a:p>
             <a:pPr>
-              <a:defRPr b="1" sz="2800">
+              <a:defRPr sz="2800" b="1">
                 <a:solidFill>
                   <a:srgbClr val="0A2540"/>
                 </a:solidFill>
@@ -3800,7 +3941,7 @@
         </p:nvSpPr>
         <p:spPr>
           <a:xfrm>
-            <a:off x="731520" y="1005840"/>
+            <a:off x="731520" y="1342724"/>
             <a:ext cx="10728655" cy="457200"/>
           </a:xfrm>
           <a:prstGeom prst="rect">
@@ -3823,7 +3964,28 @@
               </a:defRPr>
             </a:pPr>
             <a:r>
-              <a:t>Croisement des capteurs CMAPSS et prédiction LSTM.</a:t>
+              <a:rPr dirty="0" err="1"/>
+              <a:t>Croisement</a:t>
+            </a:r>
+            <a:r>
+              <a:rPr dirty="0"/>
+              <a:t> des </a:t>
+            </a:r>
+            <a:r>
+              <a:rPr dirty="0" err="1"/>
+              <a:t>capteurs</a:t>
+            </a:r>
+            <a:r>
+              <a:rPr dirty="0"/>
+              <a:t> CMAPSS et </a:t>
+            </a:r>
+            <a:r>
+              <a:rPr dirty="0" err="1"/>
+              <a:t>prédiction</a:t>
+            </a:r>
+            <a:r>
+              <a:rPr dirty="0"/>
+              <a:t> LSTM.</a:t>
             </a:r>
           </a:p>
         </p:txBody>
@@ -3844,7 +4006,7 @@
         </p:blipFill>
         <p:spPr>
           <a:xfrm>
-            <a:off x="2438247" y="1645920"/>
+            <a:off x="2438247" y="2011680"/>
             <a:ext cx="7315200" cy="4572000"/>
           </a:xfrm>
           <a:prstGeom prst="rect">
@@ -3861,7 +4023,7 @@
 </file>
 
 <file path=ppt/slides/slide14.xml><?xml version="1.0" encoding="utf-8"?>
-<p:sld xmlns:a="http://schemas.openxmlformats.org/drawingml/2006/main" xmlns:p="http://schemas.openxmlformats.org/presentationml/2006/main" xmlns:r="http://schemas.openxmlformats.org/officeDocument/2006/relationships">
+<p:sld xmlns:a="http://schemas.openxmlformats.org/drawingml/2006/main" xmlns:r="http://schemas.openxmlformats.org/officeDocument/2006/relationships" xmlns:p="http://schemas.openxmlformats.org/presentationml/2006/main">
   <p:cSld>
     <p:bg>
       <p:bgPr>
@@ -3877,7 +4039,14 @@
         <p:cNvGrpSpPr/>
         <p:nvPr/>
       </p:nvGrpSpPr>
-      <p:grpSpPr/>
+      <p:grpSpPr>
+        <a:xfrm>
+          <a:off x="0" y="0"/>
+          <a:ext cx="0" cy="0"/>
+          <a:chOff x="0" y="0"/>
+          <a:chExt cx="0" cy="0"/>
+        </a:xfrm>
+      </p:grpSpPr>
       <p:sp>
         <p:nvSpPr>
           <p:cNvPr id="2" name="TextBox 1"/>
@@ -3901,7 +4070,7 @@
           <a:lstStyle/>
           <a:p>
             <a:pPr>
-              <a:defRPr b="1" sz="2800">
+              <a:defRPr sz="2800" b="1">
                 <a:solidFill>
                   <a:srgbClr val="0A2540"/>
                 </a:solidFill>
@@ -3957,7 +4126,7 @@
         </p:nvSpPr>
         <p:spPr>
           <a:xfrm>
-            <a:off x="731520" y="1005840"/>
+            <a:off x="731520" y="1342724"/>
             <a:ext cx="10728655" cy="457200"/>
           </a:xfrm>
           <a:prstGeom prst="rect">
@@ -4001,7 +4170,7 @@
         </p:blipFill>
         <p:spPr>
           <a:xfrm>
-            <a:off x="2438247" y="1645920"/>
+            <a:off x="2438247" y="1920240"/>
             <a:ext cx="7315200" cy="4572000"/>
           </a:xfrm>
           <a:prstGeom prst="rect">
@@ -4018,7 +4187,7 @@
 </file>
 
 <file path=ppt/slides/slide15.xml><?xml version="1.0" encoding="utf-8"?>
-<p:sld xmlns:a="http://schemas.openxmlformats.org/drawingml/2006/main" xmlns:p="http://schemas.openxmlformats.org/presentationml/2006/main" xmlns:r="http://schemas.openxmlformats.org/officeDocument/2006/relationships">
+<p:sld xmlns:a="http://schemas.openxmlformats.org/drawingml/2006/main" xmlns:r="http://schemas.openxmlformats.org/officeDocument/2006/relationships" xmlns:p="http://schemas.openxmlformats.org/presentationml/2006/main">
   <p:cSld>
     <p:bg>
       <p:bgPr>
@@ -4034,7 +4203,14 @@
         <p:cNvGrpSpPr/>
         <p:nvPr/>
       </p:nvGrpSpPr>
-      <p:grpSpPr/>
+      <p:grpSpPr>
+        <a:xfrm>
+          <a:off x="0" y="0"/>
+          <a:ext cx="0" cy="0"/>
+          <a:chOff x="0" y="0"/>
+          <a:chExt cx="0" cy="0"/>
+        </a:xfrm>
+      </p:grpSpPr>
       <p:sp>
         <p:nvSpPr>
           <p:cNvPr id="2" name="TextBox 1"/>
@@ -4058,7 +4234,7 @@
           <a:lstStyle/>
           <a:p>
             <a:pPr>
-              <a:defRPr b="1" sz="2800">
+              <a:defRPr sz="2800" b="1">
                 <a:solidFill>
                   <a:srgbClr val="0A2540"/>
                 </a:solidFill>
@@ -4114,7 +4290,7 @@
         </p:nvSpPr>
         <p:spPr>
           <a:xfrm>
-            <a:off x="731520" y="1005840"/>
+            <a:off x="731520" y="1417320"/>
             <a:ext cx="10728655" cy="457200"/>
           </a:xfrm>
           <a:prstGeom prst="rect">
@@ -4137,7 +4313,40 @@
               </a:defRPr>
             </a:pPr>
             <a:r>
-              <a:t>Notifications MLOps en temps réel et dispatch d'équipes.</a:t>
+              <a:rPr dirty="0"/>
+              <a:t>Notifications </a:t>
+            </a:r>
+            <a:r>
+              <a:rPr dirty="0" err="1"/>
+              <a:t>MLOps</a:t>
+            </a:r>
+            <a:r>
+              <a:rPr dirty="0"/>
+              <a:t> </a:t>
+            </a:r>
+            <a:r>
+              <a:rPr dirty="0" err="1"/>
+              <a:t>en</a:t>
+            </a:r>
+            <a:r>
+              <a:rPr dirty="0"/>
+              <a:t> temps </a:t>
+            </a:r>
+            <a:r>
+              <a:rPr dirty="0" err="1"/>
+              <a:t>réel</a:t>
+            </a:r>
+            <a:r>
+              <a:rPr dirty="0"/>
+              <a:t> et dispatch </a:t>
+            </a:r>
+            <a:r>
+              <a:rPr dirty="0" err="1"/>
+              <a:t>d'équipes</a:t>
+            </a:r>
+            <a:r>
+              <a:rPr dirty="0"/>
+              <a:t>.</a:t>
             </a:r>
           </a:p>
         </p:txBody>
@@ -4158,7 +4367,7 @@
         </p:blipFill>
         <p:spPr>
           <a:xfrm>
-            <a:off x="2438247" y="1645920"/>
+            <a:off x="2438247" y="1920240"/>
             <a:ext cx="7315200" cy="4572000"/>
           </a:xfrm>
           <a:prstGeom prst="rect">
@@ -4175,7 +4384,7 @@
 </file>
 
 <file path=ppt/slides/slide16.xml><?xml version="1.0" encoding="utf-8"?>
-<p:sld xmlns:a="http://schemas.openxmlformats.org/drawingml/2006/main" xmlns:p="http://schemas.openxmlformats.org/presentationml/2006/main" xmlns:r="http://schemas.openxmlformats.org/officeDocument/2006/relationships">
+<p:sld xmlns:a="http://schemas.openxmlformats.org/drawingml/2006/main" xmlns:r="http://schemas.openxmlformats.org/officeDocument/2006/relationships" xmlns:p="http://schemas.openxmlformats.org/presentationml/2006/main">
   <p:cSld>
     <p:bg>
       <p:bgPr>
@@ -4191,7 +4400,14 @@
         <p:cNvGrpSpPr/>
         <p:nvPr/>
       </p:nvGrpSpPr>
-      <p:grpSpPr/>
+      <p:grpSpPr>
+        <a:xfrm>
+          <a:off x="0" y="0"/>
+          <a:ext cx="0" cy="0"/>
+          <a:chOff x="0" y="0"/>
+          <a:chExt cx="0" cy="0"/>
+        </a:xfrm>
+      </p:grpSpPr>
       <p:sp>
         <p:nvSpPr>
           <p:cNvPr id="2" name="TextBox 1"/>
@@ -4215,7 +4431,7 @@
           <a:lstStyle/>
           <a:p>
             <a:pPr>
-              <a:defRPr b="1" sz="3200">
+              <a:defRPr sz="3200" b="1">
                 <a:solidFill>
                   <a:srgbClr val="0A2540"/>
                 </a:solidFill>
@@ -4318,6 +4534,7 @@
                 <a:latin typeface="Segoe UI"/>
               </a:defRPr>
             </a:pPr>
+            <a:endParaRPr/>
           </a:p>
           <a:p>
             <a:pPr>
@@ -4387,7 +4604,7 @@
 </file>
 
 <file path=ppt/slides/slide17.xml><?xml version="1.0" encoding="utf-8"?>
-<p:sld xmlns:a="http://schemas.openxmlformats.org/drawingml/2006/main" xmlns:p="http://schemas.openxmlformats.org/presentationml/2006/main" xmlns:r="http://schemas.openxmlformats.org/officeDocument/2006/relationships">
+<p:sld xmlns:a="http://schemas.openxmlformats.org/drawingml/2006/main" xmlns:r="http://schemas.openxmlformats.org/officeDocument/2006/relationships" xmlns:p="http://schemas.openxmlformats.org/presentationml/2006/main">
   <p:cSld>
     <p:bg>
       <p:bgPr>
@@ -4403,7 +4620,14 @@
         <p:cNvGrpSpPr/>
         <p:nvPr/>
       </p:nvGrpSpPr>
-      <p:grpSpPr/>
+      <p:grpSpPr>
+        <a:xfrm>
+          <a:off x="0" y="0"/>
+          <a:ext cx="0" cy="0"/>
+          <a:chOff x="0" y="0"/>
+          <a:chExt cx="0" cy="0"/>
+        </a:xfrm>
+      </p:grpSpPr>
       <p:sp>
         <p:nvSpPr>
           <p:cNvPr id="2" name="TextBox 1"/>
@@ -4427,7 +4651,7 @@
           <a:lstStyle/>
           <a:p>
             <a:pPr>
-              <a:defRPr b="1" sz="3200">
+              <a:defRPr sz="3200" b="1">
                 <a:solidFill>
                   <a:srgbClr val="0A2540"/>
                 </a:solidFill>
@@ -4530,6 +4754,7 @@
                 <a:latin typeface="Segoe UI"/>
               </a:defRPr>
             </a:pPr>
+            <a:endParaRPr/>
           </a:p>
           <a:p>
             <a:pPr>
@@ -4584,6 +4809,7 @@
                 <a:latin typeface="Segoe UI"/>
               </a:defRPr>
             </a:pPr>
+            <a:endParaRPr/>
           </a:p>
           <a:p>
             <a:pPr>
@@ -4615,7 +4841,7 @@
 </file>
 
 <file path=ppt/slides/slide2.xml><?xml version="1.0" encoding="utf-8"?>
-<p:sld xmlns:a="http://schemas.openxmlformats.org/drawingml/2006/main" xmlns:p="http://schemas.openxmlformats.org/presentationml/2006/main" xmlns:r="http://schemas.openxmlformats.org/officeDocument/2006/relationships">
+<p:sld xmlns:a="http://schemas.openxmlformats.org/drawingml/2006/main" xmlns:r="http://schemas.openxmlformats.org/officeDocument/2006/relationships" xmlns:p="http://schemas.openxmlformats.org/presentationml/2006/main">
   <p:cSld>
     <p:bg>
       <p:bgPr>
@@ -4631,7 +4857,14 @@
         <p:cNvGrpSpPr/>
         <p:nvPr/>
       </p:nvGrpSpPr>
-      <p:grpSpPr/>
+      <p:grpSpPr>
+        <a:xfrm>
+          <a:off x="0" y="0"/>
+          <a:ext cx="0" cy="0"/>
+          <a:chOff x="0" y="0"/>
+          <a:chExt cx="0" cy="0"/>
+        </a:xfrm>
+      </p:grpSpPr>
       <p:sp>
         <p:nvSpPr>
           <p:cNvPr id="2" name="TextBox 1"/>
@@ -4655,7 +4888,7 @@
           <a:lstStyle/>
           <a:p>
             <a:pPr>
-              <a:defRPr b="1" sz="3200">
+              <a:defRPr sz="3200" b="1">
                 <a:solidFill>
                   <a:srgbClr val="0A2540"/>
                 </a:solidFill>
@@ -4777,6 +5010,7 @@
                 <a:latin typeface="Segoe UI"/>
               </a:defRPr>
             </a:pPr>
+            <a:endParaRPr/>
           </a:p>
           <a:p>
             <a:pPr>
@@ -4831,6 +5065,7 @@
                 <a:latin typeface="Segoe UI"/>
               </a:defRPr>
             </a:pPr>
+            <a:endParaRPr/>
           </a:p>
           <a:p>
             <a:pPr>
@@ -4881,7 +5116,7 @@
 </file>
 
 <file path=ppt/slides/slide3.xml><?xml version="1.0" encoding="utf-8"?>
-<p:sld xmlns:a="http://schemas.openxmlformats.org/drawingml/2006/main" xmlns:p="http://schemas.openxmlformats.org/presentationml/2006/main" xmlns:r="http://schemas.openxmlformats.org/officeDocument/2006/relationships">
+<p:sld xmlns:a="http://schemas.openxmlformats.org/drawingml/2006/main" xmlns:r="http://schemas.openxmlformats.org/officeDocument/2006/relationships" xmlns:p="http://schemas.openxmlformats.org/presentationml/2006/main">
   <p:cSld>
     <p:bg>
       <p:bgPr>
@@ -4897,7 +5132,14 @@
         <p:cNvGrpSpPr/>
         <p:nvPr/>
       </p:nvGrpSpPr>
-      <p:grpSpPr/>
+      <p:grpSpPr>
+        <a:xfrm>
+          <a:off x="0" y="0"/>
+          <a:ext cx="0" cy="0"/>
+          <a:chOff x="0" y="0"/>
+          <a:chExt cx="0" cy="0"/>
+        </a:xfrm>
+      </p:grpSpPr>
       <p:sp>
         <p:nvSpPr>
           <p:cNvPr id="2" name="TextBox 1"/>
@@ -4921,7 +5163,7 @@
           <a:lstStyle/>
           <a:p>
             <a:pPr>
-              <a:defRPr b="1" sz="3200">
+              <a:defRPr sz="3200" b="1">
                 <a:solidFill>
                   <a:srgbClr val="0A2540"/>
                 </a:solidFill>
@@ -5024,6 +5266,7 @@
                 <a:latin typeface="Segoe UI"/>
               </a:defRPr>
             </a:pPr>
+            <a:endParaRPr/>
           </a:p>
           <a:p>
             <a:pPr>
@@ -5093,7 +5336,7 @@
 </file>
 
 <file path=ppt/slides/slide4.xml><?xml version="1.0" encoding="utf-8"?>
-<p:sld xmlns:a="http://schemas.openxmlformats.org/drawingml/2006/main" xmlns:p="http://schemas.openxmlformats.org/presentationml/2006/main" xmlns:r="http://schemas.openxmlformats.org/officeDocument/2006/relationships">
+<p:sld xmlns:a="http://schemas.openxmlformats.org/drawingml/2006/main" xmlns:r="http://schemas.openxmlformats.org/officeDocument/2006/relationships" xmlns:p="http://schemas.openxmlformats.org/presentationml/2006/main">
   <p:cSld>
     <p:bg>
       <p:bgPr>
@@ -5109,7 +5352,14 @@
         <p:cNvGrpSpPr/>
         <p:nvPr/>
       </p:nvGrpSpPr>
-      <p:grpSpPr/>
+      <p:grpSpPr>
+        <a:xfrm>
+          <a:off x="0" y="0"/>
+          <a:ext cx="0" cy="0"/>
+          <a:chOff x="0" y="0"/>
+          <a:chExt cx="0" cy="0"/>
+        </a:xfrm>
+      </p:grpSpPr>
       <p:sp>
         <p:nvSpPr>
           <p:cNvPr id="2" name="TextBox 1"/>
@@ -5133,7 +5383,7 @@
           <a:lstStyle/>
           <a:p>
             <a:pPr>
-              <a:defRPr b="1" sz="3200">
+              <a:defRPr sz="3200" b="1">
                 <a:solidFill>
                   <a:srgbClr val="0A2540"/>
                 </a:solidFill>
@@ -5236,6 +5486,7 @@
                 <a:latin typeface="Segoe UI"/>
               </a:defRPr>
             </a:pPr>
+            <a:endParaRPr/>
           </a:p>
           <a:p>
             <a:pPr>
@@ -5305,7 +5556,7 @@
 </file>
 
 <file path=ppt/slides/slide5.xml><?xml version="1.0" encoding="utf-8"?>
-<p:sld xmlns:a="http://schemas.openxmlformats.org/drawingml/2006/main" xmlns:p="http://schemas.openxmlformats.org/presentationml/2006/main" xmlns:r="http://schemas.openxmlformats.org/officeDocument/2006/relationships">
+<p:sld xmlns:a="http://schemas.openxmlformats.org/drawingml/2006/main" xmlns:r="http://schemas.openxmlformats.org/officeDocument/2006/relationships" xmlns:p="http://schemas.openxmlformats.org/presentationml/2006/main">
   <p:cSld>
     <p:bg>
       <p:bgPr>
@@ -5321,7 +5572,14 @@
         <p:cNvGrpSpPr/>
         <p:nvPr/>
       </p:nvGrpSpPr>
-      <p:grpSpPr/>
+      <p:grpSpPr>
+        <a:xfrm>
+          <a:off x="0" y="0"/>
+          <a:ext cx="0" cy="0"/>
+          <a:chOff x="0" y="0"/>
+          <a:chExt cx="0" cy="0"/>
+        </a:xfrm>
+      </p:grpSpPr>
       <p:sp>
         <p:nvSpPr>
           <p:cNvPr id="2" name="TextBox 1"/>
@@ -5345,7 +5603,7 @@
           <a:lstStyle/>
           <a:p>
             <a:pPr>
-              <a:defRPr b="1" sz="3200">
+              <a:defRPr sz="3200" b="1">
                 <a:solidFill>
                   <a:srgbClr val="0A2540"/>
                 </a:solidFill>
@@ -5448,6 +5706,7 @@
                 <a:latin typeface="Segoe UI"/>
               </a:defRPr>
             </a:pPr>
+            <a:endParaRPr/>
           </a:p>
           <a:p>
             <a:pPr>
@@ -5517,7 +5776,7 @@
 </file>
 
 <file path=ppt/slides/slide6.xml><?xml version="1.0" encoding="utf-8"?>
-<p:sld xmlns:a="http://schemas.openxmlformats.org/drawingml/2006/main" xmlns:p="http://schemas.openxmlformats.org/presentationml/2006/main" xmlns:r="http://schemas.openxmlformats.org/officeDocument/2006/relationships">
+<p:sld xmlns:a="http://schemas.openxmlformats.org/drawingml/2006/main" xmlns:r="http://schemas.openxmlformats.org/officeDocument/2006/relationships" xmlns:p="http://schemas.openxmlformats.org/presentationml/2006/main">
   <p:cSld>
     <p:bg>
       <p:bgPr>
@@ -5533,7 +5792,14 @@
         <p:cNvGrpSpPr/>
         <p:nvPr/>
       </p:nvGrpSpPr>
-      <p:grpSpPr/>
+      <p:grpSpPr>
+        <a:xfrm>
+          <a:off x="0" y="0"/>
+          <a:ext cx="0" cy="0"/>
+          <a:chOff x="0" y="0"/>
+          <a:chExt cx="0" cy="0"/>
+        </a:xfrm>
+      </p:grpSpPr>
       <p:sp>
         <p:nvSpPr>
           <p:cNvPr id="2" name="TextBox 1"/>
@@ -5557,7 +5823,7 @@
           <a:lstStyle/>
           <a:p>
             <a:pPr>
-              <a:defRPr b="1" sz="3200">
+              <a:defRPr sz="3200" b="1">
                 <a:solidFill>
                   <a:srgbClr val="0A2540"/>
                 </a:solidFill>
@@ -5660,6 +5926,7 @@
                 <a:latin typeface="Segoe UI"/>
               </a:defRPr>
             </a:pPr>
+            <a:endParaRPr/>
           </a:p>
           <a:p>
             <a:pPr>
@@ -5729,7 +5996,7 @@
 </file>
 
 <file path=ppt/slides/slide7.xml><?xml version="1.0" encoding="utf-8"?>
-<p:sld xmlns:a="http://schemas.openxmlformats.org/drawingml/2006/main" xmlns:p="http://schemas.openxmlformats.org/presentationml/2006/main" xmlns:r="http://schemas.openxmlformats.org/officeDocument/2006/relationships">
+<p:sld xmlns:a="http://schemas.openxmlformats.org/drawingml/2006/main" xmlns:r="http://schemas.openxmlformats.org/officeDocument/2006/relationships" xmlns:p="http://schemas.openxmlformats.org/presentationml/2006/main">
   <p:cSld>
     <p:bg>
       <p:bgPr>
@@ -5745,7 +6012,14 @@
         <p:cNvGrpSpPr/>
         <p:nvPr/>
       </p:nvGrpSpPr>
-      <p:grpSpPr/>
+      <p:grpSpPr>
+        <a:xfrm>
+          <a:off x="0" y="0"/>
+          <a:ext cx="0" cy="0"/>
+          <a:chOff x="0" y="0"/>
+          <a:chExt cx="0" cy="0"/>
+        </a:xfrm>
+      </p:grpSpPr>
       <p:sp>
         <p:nvSpPr>
           <p:cNvPr id="2" name="TextBox 1"/>
@@ -5769,7 +6043,7 @@
           <a:lstStyle/>
           <a:p>
             <a:pPr>
-              <a:defRPr b="1" sz="3200">
+              <a:defRPr sz="3200" b="1">
                 <a:solidFill>
                   <a:srgbClr val="0A2540"/>
                 </a:solidFill>
@@ -5872,6 +6146,7 @@
                 <a:latin typeface="Segoe UI"/>
               </a:defRPr>
             </a:pPr>
+            <a:endParaRPr/>
           </a:p>
           <a:p>
             <a:pPr>
@@ -5922,7 +6197,7 @@
 </file>
 
 <file path=ppt/slides/slide8.xml><?xml version="1.0" encoding="utf-8"?>
-<p:sld xmlns:a="http://schemas.openxmlformats.org/drawingml/2006/main" xmlns:p="http://schemas.openxmlformats.org/presentationml/2006/main" xmlns:r="http://schemas.openxmlformats.org/officeDocument/2006/relationships">
+<p:sld xmlns:a="http://schemas.openxmlformats.org/drawingml/2006/main" xmlns:r="http://schemas.openxmlformats.org/officeDocument/2006/relationships" xmlns:p="http://schemas.openxmlformats.org/presentationml/2006/main">
   <p:cSld>
     <p:bg>
       <p:bgPr>
@@ -5938,7 +6213,14 @@
         <p:cNvGrpSpPr/>
         <p:nvPr/>
       </p:nvGrpSpPr>
-      <p:grpSpPr/>
+      <p:grpSpPr>
+        <a:xfrm>
+          <a:off x="0" y="0"/>
+          <a:ext cx="0" cy="0"/>
+          <a:chOff x="0" y="0"/>
+          <a:chExt cx="0" cy="0"/>
+        </a:xfrm>
+      </p:grpSpPr>
       <p:sp>
         <p:nvSpPr>
           <p:cNvPr id="2" name="TextBox 1"/>
@@ -5962,7 +6244,7 @@
           <a:lstStyle/>
           <a:p>
             <a:pPr>
-              <a:defRPr b="1" sz="3200">
+              <a:defRPr sz="3200" b="1">
                 <a:solidFill>
                   <a:srgbClr val="0A2540"/>
                 </a:solidFill>
@@ -6065,6 +6347,7 @@
                 <a:latin typeface="Segoe UI"/>
               </a:defRPr>
             </a:pPr>
+            <a:endParaRPr/>
           </a:p>
           <a:p>
             <a:pPr>
@@ -6134,7 +6417,7 @@
 </file>
 
 <file path=ppt/slides/slide9.xml><?xml version="1.0" encoding="utf-8"?>
-<p:sld xmlns:a="http://schemas.openxmlformats.org/drawingml/2006/main" xmlns:p="http://schemas.openxmlformats.org/presentationml/2006/main" xmlns:r="http://schemas.openxmlformats.org/officeDocument/2006/relationships">
+<p:sld xmlns:a="http://schemas.openxmlformats.org/drawingml/2006/main" xmlns:r="http://schemas.openxmlformats.org/officeDocument/2006/relationships" xmlns:p="http://schemas.openxmlformats.org/presentationml/2006/main">
   <p:cSld>
     <p:bg>
       <p:bgPr>
@@ -6150,7 +6433,14 @@
         <p:cNvGrpSpPr/>
         <p:nvPr/>
       </p:nvGrpSpPr>
-      <p:grpSpPr/>
+      <p:grpSpPr>
+        <a:xfrm>
+          <a:off x="0" y="0"/>
+          <a:ext cx="0" cy="0"/>
+          <a:chOff x="0" y="0"/>
+          <a:chExt cx="0" cy="0"/>
+        </a:xfrm>
+      </p:grpSpPr>
       <p:sp>
         <p:nvSpPr>
           <p:cNvPr id="2" name="TextBox 1"/>
@@ -6174,7 +6464,7 @@
           <a:lstStyle/>
           <a:p>
             <a:pPr>
-              <a:defRPr b="1" sz="3200">
+              <a:defRPr sz="3200" b="1">
                 <a:solidFill>
                   <a:srgbClr val="0A2540"/>
                 </a:solidFill>
@@ -6277,6 +6567,7 @@
                 <a:latin typeface="Segoe UI"/>
               </a:defRPr>
             </a:pPr>
+            <a:endParaRPr/>
           </a:p>
           <a:p>
             <a:pPr>
